--- a/src/main/docs/2025-05-30 QUDT Intro.pptx
+++ b/src/main/docs/2025-05-30 QUDT Intro.pptx
@@ -14,24 +14,24 @@
     <p:sldId id="322" r:id="rId8"/>
     <p:sldId id="301" r:id="rId9"/>
     <p:sldId id="1182" r:id="rId10"/>
-    <p:sldId id="1189" r:id="rId11"/>
+    <p:sldId id="1198" r:id="rId11"/>
     <p:sldId id="1180" r:id="rId12"/>
     <p:sldId id="1176" r:id="rId13"/>
     <p:sldId id="1190" r:id="rId14"/>
     <p:sldId id="1177" r:id="rId15"/>
-    <p:sldId id="1186" r:id="rId16"/>
-    <p:sldId id="1187" r:id="rId17"/>
-    <p:sldId id="1178" r:id="rId18"/>
-    <p:sldId id="1191" r:id="rId19"/>
-    <p:sldId id="1193" r:id="rId20"/>
-    <p:sldId id="1194" r:id="rId21"/>
-    <p:sldId id="1197" r:id="rId22"/>
-    <p:sldId id="270" r:id="rId23"/>
-    <p:sldId id="1173" r:id="rId24"/>
-    <p:sldId id="1174" r:id="rId25"/>
-    <p:sldId id="1172" r:id="rId26"/>
-    <p:sldId id="1185" r:id="rId27"/>
-    <p:sldId id="1175" r:id="rId28"/>
+    <p:sldId id="1199" r:id="rId16"/>
+    <p:sldId id="1178" r:id="rId17"/>
+    <p:sldId id="1191" r:id="rId18"/>
+    <p:sldId id="1193" r:id="rId19"/>
+    <p:sldId id="1194" r:id="rId20"/>
+    <p:sldId id="1197" r:id="rId21"/>
+    <p:sldId id="270" r:id="rId22"/>
+    <p:sldId id="1173" r:id="rId23"/>
+    <p:sldId id="1174" r:id="rId24"/>
+    <p:sldId id="1172" r:id="rId25"/>
+    <p:sldId id="1185" r:id="rId26"/>
+    <p:sldId id="1175" r:id="rId27"/>
+    <p:sldId id="1186" r:id="rId28"/>
   </p:sldIdLst>
   <p:sldSz cx="12192000" cy="6858000"/>
   <p:notesSz cx="6858000" cy="9144000"/>
@@ -220,7 +220,7 @@
           <a:p>
             <a:fld id="{C851EA85-6B79-5E4B-8F0E-8175A856623A}" type="datetimeFigureOut">
               <a:rPr lang="en-US" smtClean="0"/>
-              <a:t>5/30/25</a:t>
+              <a:t>5/5/26</a:t>
             </a:fld>
             <a:endParaRPr lang="en-US"/>
           </a:p>
@@ -927,7 +927,7 @@
           <a:p>
             <a:fld id="{D9248F6E-3AA4-4949-B454-A5A901963017}" type="slidenum">
               <a:rPr lang="en-US" smtClean="0"/>
-              <a:t>14</a:t>
+              <a:t>13</a:t>
             </a:fld>
             <a:endParaRPr lang="en-US"/>
           </a:p>
@@ -1035,7 +1035,7 @@
           <a:p>
             <a:fld id="{D9248F6E-3AA4-4949-B454-A5A901963017}" type="slidenum">
               <a:rPr lang="en-US" smtClean="0"/>
-              <a:t>15</a:t>
+              <a:t>14</a:t>
             </a:fld>
             <a:endParaRPr lang="en-US"/>
           </a:p>
@@ -1143,7 +1143,7 @@
           <a:p>
             <a:fld id="{D9248F6E-3AA4-4949-B454-A5A901963017}" type="slidenum">
               <a:rPr lang="en-US" smtClean="0"/>
-              <a:t>16</a:t>
+              <a:t>15</a:t>
             </a:fld>
             <a:endParaRPr lang="en-US"/>
           </a:p>
@@ -1254,34 +1254,6 @@
       </p:sp>
       <p:sp>
         <p:nvSpPr>
-          <p:cNvPr id="4" name="Date Placeholder 3">
-            <a:extLst>
-              <a:ext uri="{FF2B5EF4-FFF2-40B4-BE49-F238E27FC236}">
-                <a16:creationId xmlns:a16="http://schemas.microsoft.com/office/drawing/2014/main" id="{22A1BC27-08F7-2547-BEB5-4E8727924213}"/>
-              </a:ext>
-            </a:extLst>
-          </p:cNvPr>
-          <p:cNvSpPr>
-            <a:spLocks noGrp="1"/>
-          </p:cNvSpPr>
-          <p:nvPr>
-            <p:ph type="dt" sz="half" idx="10"/>
-          </p:nvPr>
-        </p:nvSpPr>
-        <p:spPr/>
-        <p:txBody>
-          <a:bodyPr/>
-          <a:lstStyle/>
-          <a:p>
-            <a:r>
-              <a:rPr lang="en-US"/>
-              <a:t>20th May, 2025</a:t>
-            </a:r>
-          </a:p>
-        </p:txBody>
-      </p:sp>
-      <p:sp>
-        <p:nvSpPr>
           <p:cNvPr id="5" name="Footer Placeholder 4">
             <a:extLst>
               <a:ext uri="{FF2B5EF4-FFF2-40B4-BE49-F238E27FC236}">
@@ -1334,6 +1306,42 @@
               <a:t>‹#›</a:t>
             </a:fld>
             <a:endParaRPr lang="en-US"/>
+          </a:p>
+        </p:txBody>
+      </p:sp>
+      <p:sp>
+        <p:nvSpPr>
+          <p:cNvPr id="2" name="Date Placeholder 2">
+            <a:extLst>
+              <a:ext uri="{FF2B5EF4-FFF2-40B4-BE49-F238E27FC236}">
+                <a16:creationId xmlns:a16="http://schemas.microsoft.com/office/drawing/2014/main" id="{FDC02304-8EE3-45B4-A62C-E39DBE64638F}"/>
+              </a:ext>
+            </a:extLst>
+          </p:cNvPr>
+          <p:cNvSpPr>
+            <a:spLocks noGrp="1"/>
+          </p:cNvSpPr>
+          <p:nvPr>
+            <p:ph type="dt" sz="half" idx="10"/>
+          </p:nvPr>
+        </p:nvSpPr>
+        <p:spPr>
+          <a:xfrm>
+            <a:off x="187219" y="6356350"/>
+            <a:ext cx="2743200" cy="365125"/>
+          </a:xfrm>
+          <a:prstGeom prst="rect">
+            <a:avLst/>
+          </a:prstGeom>
+        </p:spPr>
+        <p:txBody>
+          <a:bodyPr/>
+          <a:lstStyle/>
+          <a:p>
+            <a:r>
+              <a:rPr lang="en-US" dirty="0"/>
+              <a:t>8 May 2025</a:t>
+            </a:r>
           </a:p>
         </p:txBody>
       </p:sp>
@@ -1486,34 +1494,6 @@
       </p:sp>
       <p:sp>
         <p:nvSpPr>
-          <p:cNvPr id="4" name="Date Placeholder 3">
-            <a:extLst>
-              <a:ext uri="{FF2B5EF4-FFF2-40B4-BE49-F238E27FC236}">
-                <a16:creationId xmlns:a16="http://schemas.microsoft.com/office/drawing/2014/main" id="{624DD423-216E-564A-9FE3-9BD48827BADE}"/>
-              </a:ext>
-            </a:extLst>
-          </p:cNvPr>
-          <p:cNvSpPr>
-            <a:spLocks noGrp="1"/>
-          </p:cNvSpPr>
-          <p:nvPr>
-            <p:ph type="dt" sz="half" idx="10"/>
-          </p:nvPr>
-        </p:nvSpPr>
-        <p:spPr/>
-        <p:txBody>
-          <a:bodyPr/>
-          <a:lstStyle/>
-          <a:p>
-            <a:r>
-              <a:rPr lang="en-US"/>
-              <a:t>20th May, 2025</a:t>
-            </a:r>
-          </a:p>
-        </p:txBody>
-      </p:sp>
-      <p:sp>
-        <p:nvSpPr>
           <p:cNvPr id="5" name="Footer Placeholder 4">
             <a:extLst>
               <a:ext uri="{FF2B5EF4-FFF2-40B4-BE49-F238E27FC236}">
@@ -1566,6 +1546,42 @@
               <a:t>‹#›</a:t>
             </a:fld>
             <a:endParaRPr lang="en-US"/>
+          </a:p>
+        </p:txBody>
+      </p:sp>
+      <p:sp>
+        <p:nvSpPr>
+          <p:cNvPr id="7" name="Date Placeholder 2">
+            <a:extLst>
+              <a:ext uri="{FF2B5EF4-FFF2-40B4-BE49-F238E27FC236}">
+                <a16:creationId xmlns:a16="http://schemas.microsoft.com/office/drawing/2014/main" id="{27CBD9A6-2DD1-E150-2BB3-3DC95D8ECB07}"/>
+              </a:ext>
+            </a:extLst>
+          </p:cNvPr>
+          <p:cNvSpPr>
+            <a:spLocks noGrp="1"/>
+          </p:cNvSpPr>
+          <p:nvPr>
+            <p:ph type="dt" sz="half" idx="10"/>
+          </p:nvPr>
+        </p:nvSpPr>
+        <p:spPr>
+          <a:xfrm>
+            <a:off x="187219" y="6356350"/>
+            <a:ext cx="2743200" cy="365125"/>
+          </a:xfrm>
+          <a:prstGeom prst="rect">
+            <a:avLst/>
+          </a:prstGeom>
+        </p:spPr>
+        <p:txBody>
+          <a:bodyPr/>
+          <a:lstStyle/>
+          <a:p>
+            <a:r>
+              <a:rPr lang="en-US" dirty="0"/>
+              <a:t>8 May 2025</a:t>
+            </a:r>
           </a:p>
         </p:txBody>
       </p:sp>
@@ -1718,34 +1734,6 @@
       </p:sp>
       <p:sp>
         <p:nvSpPr>
-          <p:cNvPr id="4" name="Date Placeholder 3">
-            <a:extLst>
-              <a:ext uri="{FF2B5EF4-FFF2-40B4-BE49-F238E27FC236}">
-                <a16:creationId xmlns:a16="http://schemas.microsoft.com/office/drawing/2014/main" id="{624DD423-216E-564A-9FE3-9BD48827BADE}"/>
-              </a:ext>
-            </a:extLst>
-          </p:cNvPr>
-          <p:cNvSpPr>
-            <a:spLocks noGrp="1"/>
-          </p:cNvSpPr>
-          <p:nvPr>
-            <p:ph type="dt" sz="half" idx="10"/>
-          </p:nvPr>
-        </p:nvSpPr>
-        <p:spPr/>
-        <p:txBody>
-          <a:bodyPr/>
-          <a:lstStyle/>
-          <a:p>
-            <a:r>
-              <a:rPr lang="en-US"/>
-              <a:t>20th May, 2025</a:t>
-            </a:r>
-          </a:p>
-        </p:txBody>
-      </p:sp>
-      <p:sp>
-        <p:nvSpPr>
           <p:cNvPr id="5" name="Footer Placeholder 4">
             <a:extLst>
               <a:ext uri="{FF2B5EF4-FFF2-40B4-BE49-F238E27FC236}">
@@ -1798,6 +1786,42 @@
               <a:t>‹#›</a:t>
             </a:fld>
             <a:endParaRPr lang="en-US"/>
+          </a:p>
+        </p:txBody>
+      </p:sp>
+      <p:sp>
+        <p:nvSpPr>
+          <p:cNvPr id="7" name="Date Placeholder 2">
+            <a:extLst>
+              <a:ext uri="{FF2B5EF4-FFF2-40B4-BE49-F238E27FC236}">
+                <a16:creationId xmlns:a16="http://schemas.microsoft.com/office/drawing/2014/main" id="{62CDC006-C470-8910-E157-A625EDB5D954}"/>
+              </a:ext>
+            </a:extLst>
+          </p:cNvPr>
+          <p:cNvSpPr>
+            <a:spLocks noGrp="1"/>
+          </p:cNvSpPr>
+          <p:nvPr>
+            <p:ph type="dt" sz="half" idx="10"/>
+          </p:nvPr>
+        </p:nvSpPr>
+        <p:spPr>
+          <a:xfrm>
+            <a:off x="187219" y="6356350"/>
+            <a:ext cx="2743200" cy="365125"/>
+          </a:xfrm>
+          <a:prstGeom prst="rect">
+            <a:avLst/>
+          </a:prstGeom>
+        </p:spPr>
+        <p:txBody>
+          <a:bodyPr/>
+          <a:lstStyle/>
+          <a:p>
+            <a:r>
+              <a:rPr lang="en-US" dirty="0"/>
+              <a:t>8 May 2025</a:t>
+            </a:r>
           </a:p>
         </p:txBody>
       </p:sp>
@@ -1951,34 +1975,6 @@
       </p:sp>
       <p:sp>
         <p:nvSpPr>
-          <p:cNvPr id="4" name="Date Placeholder 3">
-            <a:extLst>
-              <a:ext uri="{FF2B5EF4-FFF2-40B4-BE49-F238E27FC236}">
-                <a16:creationId xmlns:a16="http://schemas.microsoft.com/office/drawing/2014/main" id="{624DD423-216E-564A-9FE3-9BD48827BADE}"/>
-              </a:ext>
-            </a:extLst>
-          </p:cNvPr>
-          <p:cNvSpPr>
-            <a:spLocks noGrp="1"/>
-          </p:cNvSpPr>
-          <p:nvPr>
-            <p:ph type="dt" sz="half" idx="10"/>
-          </p:nvPr>
-        </p:nvSpPr>
-        <p:spPr/>
-        <p:txBody>
-          <a:bodyPr/>
-          <a:lstStyle/>
-          <a:p>
-            <a:r>
-              <a:rPr lang="en-US"/>
-              <a:t>20th May, 2025</a:t>
-            </a:r>
-          </a:p>
-        </p:txBody>
-      </p:sp>
-      <p:sp>
-        <p:nvSpPr>
           <p:cNvPr id="5" name="Footer Placeholder 4">
             <a:extLst>
               <a:ext uri="{FF2B5EF4-FFF2-40B4-BE49-F238E27FC236}">
@@ -2031,6 +2027,42 @@
               <a:t>‹#›</a:t>
             </a:fld>
             <a:endParaRPr lang="en-US"/>
+          </a:p>
+        </p:txBody>
+      </p:sp>
+      <p:sp>
+        <p:nvSpPr>
+          <p:cNvPr id="3" name="Date Placeholder 2">
+            <a:extLst>
+              <a:ext uri="{FF2B5EF4-FFF2-40B4-BE49-F238E27FC236}">
+                <a16:creationId xmlns:a16="http://schemas.microsoft.com/office/drawing/2014/main" id="{9C03D255-EC71-0E25-3219-3E15FBFCFBCF}"/>
+              </a:ext>
+            </a:extLst>
+          </p:cNvPr>
+          <p:cNvSpPr>
+            <a:spLocks noGrp="1"/>
+          </p:cNvSpPr>
+          <p:nvPr>
+            <p:ph type="dt" sz="half" idx="10"/>
+          </p:nvPr>
+        </p:nvSpPr>
+        <p:spPr>
+          <a:xfrm>
+            <a:off x="187219" y="6356350"/>
+            <a:ext cx="2743200" cy="365125"/>
+          </a:xfrm>
+          <a:prstGeom prst="rect">
+            <a:avLst/>
+          </a:prstGeom>
+        </p:spPr>
+        <p:txBody>
+          <a:bodyPr/>
+          <a:lstStyle/>
+          <a:p>
+            <a:r>
+              <a:rPr lang="en-US" dirty="0"/>
+              <a:t>8 May 2025</a:t>
+            </a:r>
           </a:p>
         </p:txBody>
       </p:sp>
@@ -2108,14 +2140,22 @@
             <p:ph type="dt" sz="half" idx="10"/>
           </p:nvPr>
         </p:nvSpPr>
-        <p:spPr/>
+        <p:spPr>
+          <a:xfrm>
+            <a:off x="187219" y="6356350"/>
+            <a:ext cx="2743200" cy="365125"/>
+          </a:xfrm>
+          <a:prstGeom prst="rect">
+            <a:avLst/>
+          </a:prstGeom>
+        </p:spPr>
         <p:txBody>
           <a:bodyPr/>
           <a:lstStyle/>
           <a:p>
             <a:r>
-              <a:rPr lang="en-US"/>
-              <a:t>20th May, 2025</a:t>
+              <a:rPr lang="en-US" dirty="0"/>
+              <a:t>8 May 2025</a:t>
             </a:r>
           </a:p>
         </p:txBody>
@@ -2261,52 +2301,6 @@
       </p:sp>
       <p:sp>
         <p:nvSpPr>
-          <p:cNvPr id="4" name="Date Placeholder 3">
-            <a:extLst>
-              <a:ext uri="{FF2B5EF4-FFF2-40B4-BE49-F238E27FC236}">
-                <a16:creationId xmlns:a16="http://schemas.microsoft.com/office/drawing/2014/main" id="{AA9D3811-064E-D745-8151-8B73C3885113}"/>
-              </a:ext>
-            </a:extLst>
-          </p:cNvPr>
-          <p:cNvSpPr>
-            <a:spLocks noGrp="1"/>
-          </p:cNvSpPr>
-          <p:nvPr>
-            <p:ph type="dt" sz="half" idx="2"/>
-          </p:nvPr>
-        </p:nvSpPr>
-        <p:spPr>
-          <a:xfrm>
-            <a:off x="187219" y="6356350"/>
-            <a:ext cx="2743200" cy="365125"/>
-          </a:xfrm>
-          <a:prstGeom prst="rect">
-            <a:avLst/>
-          </a:prstGeom>
-        </p:spPr>
-        <p:txBody>
-          <a:bodyPr vert="horz" lIns="91440" tIns="45720" rIns="91440" bIns="45720" rtlCol="0" anchor="ctr"/>
-          <a:lstStyle>
-            <a:lvl1pPr algn="l">
-              <a:defRPr sz="1200">
-                <a:solidFill>
-                  <a:schemeClr val="tx1">
-                    <a:tint val="75000"/>
-                  </a:schemeClr>
-                </a:solidFill>
-              </a:defRPr>
-            </a:lvl1pPr>
-          </a:lstStyle>
-          <a:p>
-            <a:r>
-              <a:rPr lang="en-US"/>
-              <a:t>20th May, 2025</a:t>
-            </a:r>
-          </a:p>
-        </p:txBody>
-      </p:sp>
-      <p:sp>
-        <p:nvSpPr>
           <p:cNvPr id="5" name="Footer Placeholder 4">
             <a:extLst>
               <a:ext uri="{FF2B5EF4-FFF2-40B4-BE49-F238E27FC236}">
@@ -2428,6 +2422,42 @@
           </a:prstGeom>
         </p:spPr>
       </p:pic>
+      <p:sp>
+        <p:nvSpPr>
+          <p:cNvPr id="3" name="Date Placeholder 2">
+            <a:extLst>
+              <a:ext uri="{FF2B5EF4-FFF2-40B4-BE49-F238E27FC236}">
+                <a16:creationId xmlns:a16="http://schemas.microsoft.com/office/drawing/2014/main" id="{DD28C416-FAC7-01B1-42F1-995CF278552F}"/>
+              </a:ext>
+            </a:extLst>
+          </p:cNvPr>
+          <p:cNvSpPr>
+            <a:spLocks noGrp="1"/>
+          </p:cNvSpPr>
+          <p:nvPr>
+            <p:ph type="dt" sz="half" idx="2"/>
+          </p:nvPr>
+        </p:nvSpPr>
+        <p:spPr>
+          <a:xfrm>
+            <a:off x="187219" y="6356350"/>
+            <a:ext cx="2743200" cy="365125"/>
+          </a:xfrm>
+          <a:prstGeom prst="rect">
+            <a:avLst/>
+          </a:prstGeom>
+        </p:spPr>
+        <p:txBody>
+          <a:bodyPr/>
+          <a:lstStyle/>
+          <a:p>
+            <a:r>
+              <a:rPr lang="en-US" dirty="0"/>
+              <a:t>8 May 2025</a:t>
+            </a:r>
+          </a:p>
+        </p:txBody>
+      </p:sp>
     </p:spTree>
     <p:extLst>
       <p:ext uri="{BB962C8B-B14F-4D97-AF65-F5344CB8AC3E}">
@@ -2790,7 +2820,7 @@
             </a:pPr>
             <a:r>
               <a:rPr lang="en-US" sz="12800" dirty="0"/>
-              <a:t>May 20, 2025</a:t>
+              <a:t>May 8, 2026</a:t>
             </a:r>
             <a:endParaRPr lang="en-US" sz="9600" dirty="0">
               <a:ea typeface="Calibri"/>
@@ -2823,26 +2853,6 @@
               <a:cs typeface="Calibri"/>
             </a:endParaRPr>
           </a:p>
-          <a:p>
-            <a:r>
-              <a:rPr lang="en-US" sz="9600" dirty="0">
-                <a:ea typeface="Calibri"/>
-                <a:cs typeface="Calibri"/>
-              </a:rPr>
-              <a:t>Ralph Hodgson, President </a:t>
-            </a:r>
-            <a:r>
-              <a:rPr lang="en-US" sz="9600" dirty="0" err="1">
-                <a:ea typeface="Calibri" panose="020F0502020204030204"/>
-                <a:cs typeface="Calibri" panose="020F0502020204030204"/>
-              </a:rPr>
-              <a:t>QUDT.org</a:t>
-            </a:r>
-            <a:endParaRPr lang="en-US" sz="9600" dirty="0">
-              <a:ea typeface="Calibri"/>
-              <a:cs typeface="Calibri"/>
-            </a:endParaRPr>
-          </a:p>
         </p:txBody>
       </p:sp>
       <p:sp>
@@ -2861,14 +2871,19 @@
             <p:ph type="dt" sz="half" idx="10"/>
           </p:nvPr>
         </p:nvSpPr>
-        <p:spPr/>
+        <p:spPr>
+          <a:xfrm>
+            <a:off x="187219" y="6356350"/>
+            <a:ext cx="2743200" cy="365125"/>
+          </a:xfrm>
+        </p:spPr>
         <p:txBody>
           <a:bodyPr/>
           <a:lstStyle/>
           <a:p>
             <a:r>
-              <a:rPr lang="en-US"/>
-              <a:t>20th May, 2025</a:t>
+              <a:rPr lang="en-US" dirty="0"/>
+              <a:t>8th May, 2026</a:t>
             </a:r>
           </a:p>
         </p:txBody>
@@ -3261,39 +3276,6 @@
               <a:ea typeface="Calibri"/>
               <a:cs typeface="Calibri"/>
             </a:endParaRPr>
-          </a:p>
-        </p:txBody>
-      </p:sp>
-      <p:sp>
-        <p:nvSpPr>
-          <p:cNvPr id="8" name="Date Placeholder 7">
-            <a:extLst>
-              <a:ext uri="{FF2B5EF4-FFF2-40B4-BE49-F238E27FC236}">
-                <a16:creationId xmlns:a16="http://schemas.microsoft.com/office/drawing/2014/main" id="{E1AD49A1-0A70-761A-D9A8-7376D9D78B3C}"/>
-              </a:ext>
-            </a:extLst>
-          </p:cNvPr>
-          <p:cNvSpPr>
-            <a:spLocks noGrp="1"/>
-          </p:cNvSpPr>
-          <p:nvPr>
-            <p:ph type="dt" sz="half" idx="10"/>
-          </p:nvPr>
-        </p:nvSpPr>
-        <p:spPr>
-          <a:xfrm>
-            <a:off x="185468" y="6492875"/>
-            <a:ext cx="2743200" cy="365125"/>
-          </a:xfrm>
-        </p:spPr>
-        <p:txBody>
-          <a:bodyPr/>
-          <a:lstStyle/>
-          <a:p>
-            <a:r>
-              <a:rPr lang="en-US"/>
-              <a:t>20th May, 2025</a:t>
-            </a:r>
           </a:p>
         </p:txBody>
       </p:sp>
@@ -3573,6 +3555,39 @@
           </a:p>
         </p:txBody>
       </p:sp>
+      <p:sp>
+        <p:nvSpPr>
+          <p:cNvPr id="5" name="Date Placeholder 2">
+            <a:extLst>
+              <a:ext uri="{FF2B5EF4-FFF2-40B4-BE49-F238E27FC236}">
+                <a16:creationId xmlns:a16="http://schemas.microsoft.com/office/drawing/2014/main" id="{8DD1209B-7C42-4EE6-2F92-39C2C5554045}"/>
+              </a:ext>
+            </a:extLst>
+          </p:cNvPr>
+          <p:cNvSpPr>
+            <a:spLocks noGrp="1"/>
+          </p:cNvSpPr>
+          <p:nvPr>
+            <p:ph type="dt" sz="half" idx="10"/>
+          </p:nvPr>
+        </p:nvSpPr>
+        <p:spPr>
+          <a:xfrm>
+            <a:off x="187219" y="6526169"/>
+            <a:ext cx="2743200" cy="365125"/>
+          </a:xfrm>
+        </p:spPr>
+        <p:txBody>
+          <a:bodyPr/>
+          <a:lstStyle/>
+          <a:p>
+            <a:r>
+              <a:rPr lang="en-US" dirty="0"/>
+              <a:t>8 May 2025</a:t>
+            </a:r>
+          </a:p>
+        </p:txBody>
+      </p:sp>
     </p:spTree>
     <p:extLst>
       <p:ext uri="{BB962C8B-B14F-4D97-AF65-F5344CB8AC3E}">
@@ -4046,34 +4061,6 @@
       </p:sp>
       <p:sp>
         <p:nvSpPr>
-          <p:cNvPr id="6" name="Date Placeholder 5">
-            <a:extLst>
-              <a:ext uri="{FF2B5EF4-FFF2-40B4-BE49-F238E27FC236}">
-                <a16:creationId xmlns:a16="http://schemas.microsoft.com/office/drawing/2014/main" id="{7DB82BDC-6153-6AA2-1F02-6F51D128A280}"/>
-              </a:ext>
-            </a:extLst>
-          </p:cNvPr>
-          <p:cNvSpPr>
-            <a:spLocks noGrp="1"/>
-          </p:cNvSpPr>
-          <p:nvPr>
-            <p:ph type="dt" sz="half" idx="10"/>
-          </p:nvPr>
-        </p:nvSpPr>
-        <p:spPr/>
-        <p:txBody>
-          <a:bodyPr/>
-          <a:lstStyle/>
-          <a:p>
-            <a:r>
-              <a:rPr lang="en-US"/>
-              <a:t>20th May, 2025</a:t>
-            </a:r>
-          </a:p>
-        </p:txBody>
-      </p:sp>
-      <p:sp>
-        <p:nvSpPr>
           <p:cNvPr id="7" name="Footer Placeholder 6">
             <a:extLst>
               <a:ext uri="{FF2B5EF4-FFF2-40B4-BE49-F238E27FC236}">
@@ -4126,6 +4113,39 @@
               <a:t>11</a:t>
             </a:fld>
             <a:endParaRPr lang="en-US"/>
+          </a:p>
+        </p:txBody>
+      </p:sp>
+      <p:sp>
+        <p:nvSpPr>
+          <p:cNvPr id="4" name="Date Placeholder 2">
+            <a:extLst>
+              <a:ext uri="{FF2B5EF4-FFF2-40B4-BE49-F238E27FC236}">
+                <a16:creationId xmlns:a16="http://schemas.microsoft.com/office/drawing/2014/main" id="{4DA25676-6316-3C16-4544-7D53487F31A0}"/>
+              </a:ext>
+            </a:extLst>
+          </p:cNvPr>
+          <p:cNvSpPr>
+            <a:spLocks noGrp="1"/>
+          </p:cNvSpPr>
+          <p:nvPr>
+            <p:ph type="dt" sz="half" idx="10"/>
+          </p:nvPr>
+        </p:nvSpPr>
+        <p:spPr>
+          <a:xfrm>
+            <a:off x="187219" y="6356350"/>
+            <a:ext cx="2743200" cy="365125"/>
+          </a:xfrm>
+        </p:spPr>
+        <p:txBody>
+          <a:bodyPr/>
+          <a:lstStyle/>
+          <a:p>
+            <a:r>
+              <a:rPr lang="en-US" dirty="0"/>
+              <a:t>8 May 2025</a:t>
+            </a:r>
           </a:p>
         </p:txBody>
       </p:sp>
@@ -4143,189 +4163,6 @@
 </file>
 
 <file path=ppt/slides/slide12.xml><?xml version="1.0" encoding="utf-8"?>
-<p:sld xmlns:a="http://schemas.openxmlformats.org/drawingml/2006/main" xmlns:r="http://schemas.openxmlformats.org/officeDocument/2006/relationships" xmlns:p="http://schemas.openxmlformats.org/presentationml/2006/main">
-  <p:cSld>
-    <p:spTree>
-      <p:nvGrpSpPr>
-        <p:cNvPr id="1" name=""/>
-        <p:cNvGrpSpPr/>
-        <p:nvPr/>
-      </p:nvGrpSpPr>
-      <p:grpSpPr>
-        <a:xfrm>
-          <a:off x="0" y="0"/>
-          <a:ext cx="0" cy="0"/>
-          <a:chOff x="0" y="0"/>
-          <a:chExt cx="0" cy="0"/>
-        </a:xfrm>
-      </p:grpSpPr>
-      <p:sp>
-        <p:nvSpPr>
-          <p:cNvPr id="4" name="Date Placeholder 3">
-            <a:extLst>
-              <a:ext uri="{FF2B5EF4-FFF2-40B4-BE49-F238E27FC236}">
-                <a16:creationId xmlns:a16="http://schemas.microsoft.com/office/drawing/2014/main" id="{0D779DA2-67F1-380D-13F8-0F81D7C14C70}"/>
-              </a:ext>
-            </a:extLst>
-          </p:cNvPr>
-          <p:cNvSpPr>
-            <a:spLocks noGrp="1"/>
-          </p:cNvSpPr>
-          <p:nvPr>
-            <p:ph type="dt" sz="half" idx="10"/>
-          </p:nvPr>
-        </p:nvSpPr>
-        <p:spPr/>
-        <p:txBody>
-          <a:bodyPr/>
-          <a:lstStyle/>
-          <a:p>
-            <a:r>
-              <a:rPr lang="en-US"/>
-              <a:t>20th May, 2025</a:t>
-            </a:r>
-          </a:p>
-        </p:txBody>
-      </p:sp>
-      <p:sp>
-        <p:nvSpPr>
-          <p:cNvPr id="5" name="Footer Placeholder 4">
-            <a:extLst>
-              <a:ext uri="{FF2B5EF4-FFF2-40B4-BE49-F238E27FC236}">
-                <a16:creationId xmlns:a16="http://schemas.microsoft.com/office/drawing/2014/main" id="{5B7FA5A8-14B9-FC9C-624B-DFEFE4A0B7B8}"/>
-              </a:ext>
-            </a:extLst>
-          </p:cNvPr>
-          <p:cNvSpPr>
-            <a:spLocks noGrp="1"/>
-          </p:cNvSpPr>
-          <p:nvPr>
-            <p:ph type="ftr" sz="quarter" idx="11"/>
-          </p:nvPr>
-        </p:nvSpPr>
-        <p:spPr/>
-        <p:txBody>
-          <a:bodyPr/>
-          <a:lstStyle/>
-          <a:p>
-            <a:r>
-              <a:rPr lang="en-US"/>
-              <a:t>QUDT Introduction</a:t>
-            </a:r>
-          </a:p>
-        </p:txBody>
-      </p:sp>
-      <p:sp>
-        <p:nvSpPr>
-          <p:cNvPr id="6" name="Slide Number Placeholder 5">
-            <a:extLst>
-              <a:ext uri="{FF2B5EF4-FFF2-40B4-BE49-F238E27FC236}">
-                <a16:creationId xmlns:a16="http://schemas.microsoft.com/office/drawing/2014/main" id="{0176D55D-4642-EB0C-3882-71E210E41F51}"/>
-              </a:ext>
-            </a:extLst>
-          </p:cNvPr>
-          <p:cNvSpPr>
-            <a:spLocks noGrp="1"/>
-          </p:cNvSpPr>
-          <p:nvPr>
-            <p:ph type="sldNum" sz="quarter" idx="12"/>
-          </p:nvPr>
-        </p:nvSpPr>
-        <p:spPr/>
-        <p:txBody>
-          <a:bodyPr/>
-          <a:lstStyle/>
-          <a:p>
-            <a:fld id="{E8B94566-E730-314F-8C05-3849AEE21A50}" type="slidenum">
-              <a:rPr lang="en-US" smtClean="0"/>
-              <a:t>12</a:t>
-            </a:fld>
-            <a:endParaRPr lang="en-US"/>
-          </a:p>
-        </p:txBody>
-      </p:sp>
-      <p:pic>
-        <p:nvPicPr>
-          <p:cNvPr id="9" name="Picture 8" descr="A screenshot of a graph&#10;&#10;AI-generated content may be incorrect.">
-            <a:extLst>
-              <a:ext uri="{FF2B5EF4-FFF2-40B4-BE49-F238E27FC236}">
-                <a16:creationId xmlns:a16="http://schemas.microsoft.com/office/drawing/2014/main" id="{765F8533-3A40-F4E8-C876-B7DD309FB167}"/>
-              </a:ext>
-            </a:extLst>
-          </p:cNvPr>
-          <p:cNvPicPr>
-            <a:picLocks noChangeAspect="1"/>
-          </p:cNvPicPr>
-          <p:nvPr/>
-        </p:nvPicPr>
-        <p:blipFill>
-          <a:blip r:embed="rId2"/>
-          <a:stretch>
-            <a:fillRect/>
-          </a:stretch>
-        </p:blipFill>
-        <p:spPr>
-          <a:xfrm>
-            <a:off x="2311968" y="114189"/>
-            <a:ext cx="7758155" cy="6424723"/>
-          </a:xfrm>
-          <a:prstGeom prst="rect">
-            <a:avLst/>
-          </a:prstGeom>
-        </p:spPr>
-      </p:pic>
-      <p:pic>
-        <p:nvPicPr>
-          <p:cNvPr id="10" name="Picture 6" descr="4Color">
-            <a:extLst>
-              <a:ext uri="{FF2B5EF4-FFF2-40B4-BE49-F238E27FC236}">
-                <a16:creationId xmlns:a16="http://schemas.microsoft.com/office/drawing/2014/main" id="{A1C96B09-BEE0-D49F-03ED-3995833BA752}"/>
-              </a:ext>
-            </a:extLst>
-          </p:cNvPr>
-          <p:cNvPicPr>
-            <a:picLocks noChangeAspect="1" noChangeArrowheads="1"/>
-          </p:cNvPicPr>
-          <p:nvPr/>
-        </p:nvPicPr>
-        <p:blipFill>
-          <a:blip r:embed="rId3" cstate="print"/>
-          <a:srcRect/>
-          <a:stretch>
-            <a:fillRect/>
-          </a:stretch>
-        </p:blipFill>
-        <p:spPr bwMode="auto">
-          <a:xfrm>
-            <a:off x="3030416" y="710955"/>
-            <a:ext cx="687388" cy="569875"/>
-          </a:xfrm>
-          <a:prstGeom prst="rect">
-            <a:avLst/>
-          </a:prstGeom>
-          <a:noFill/>
-          <a:ln w="9525">
-            <a:noFill/>
-            <a:miter lim="800000"/>
-            <a:headEnd/>
-            <a:tailEnd/>
-          </a:ln>
-        </p:spPr>
-      </p:pic>
-    </p:spTree>
-    <p:extLst>
-      <p:ext uri="{BB962C8B-B14F-4D97-AF65-F5344CB8AC3E}">
-        <p14:creationId xmlns:p14="http://schemas.microsoft.com/office/powerpoint/2010/main" val="1263915834"/>
-      </p:ext>
-    </p:extLst>
-  </p:cSld>
-  <p:clrMapOvr>
-    <a:masterClrMapping/>
-  </p:clrMapOvr>
-</p:sld>
-</file>
-
-<file path=ppt/slides/slide13.xml><?xml version="1.0" encoding="utf-8"?>
 <p:sld xmlns:a="http://schemas.openxmlformats.org/drawingml/2006/main" xmlns:r="http://schemas.openxmlformats.org/officeDocument/2006/relationships" xmlns:p="http://schemas.openxmlformats.org/presentationml/2006/main">
   <p:cSld>
     <p:spTree>
@@ -4350,152 +4187,19 @@
       </p:grpSpPr>
       <p:sp>
         <p:nvSpPr>
-          <p:cNvPr id="11" name="Rounded Rectangle 3">
-            <a:extLst>
-              <a:ext uri="{FF2B5EF4-FFF2-40B4-BE49-F238E27FC236}">
-                <a16:creationId xmlns:a16="http://schemas.microsoft.com/office/drawing/2014/main" id="{9749E589-9AC2-4B6D-D468-9DAFE82E76C3}"/>
-              </a:ext>
-            </a:extLst>
-          </p:cNvPr>
-          <p:cNvSpPr/>
+          <p:cNvPr id="2" name="TextBox 1">
+            <a:extLst>
+              <a:ext uri="{FF2B5EF4-FFF2-40B4-BE49-F238E27FC236}">
+                <a16:creationId xmlns:a16="http://schemas.microsoft.com/office/drawing/2014/main" id="{91C25C81-3A4A-6203-38EC-5ACB7977A7A3}"/>
+              </a:ext>
+            </a:extLst>
+          </p:cNvPr>
+          <p:cNvSpPr txBox="1"/>
           <p:nvPr/>
         </p:nvSpPr>
         <p:spPr>
           <a:xfrm>
-            <a:off x="6063830" y="2211827"/>
-            <a:ext cx="5508884" cy="3611517"/>
-          </a:xfrm>
-          <a:prstGeom prst="roundRect">
-            <a:avLst>
-              <a:gd name="adj" fmla="val 2754"/>
-            </a:avLst>
-          </a:prstGeom>
-        </p:spPr>
-        <p:style>
-          <a:lnRef idx="2">
-            <a:schemeClr val="accent1">
-              <a:shade val="15000"/>
-            </a:schemeClr>
-          </a:lnRef>
-          <a:fillRef idx="1">
-            <a:schemeClr val="accent1"/>
-          </a:fillRef>
-          <a:effectRef idx="0">
-            <a:schemeClr val="accent1"/>
-          </a:effectRef>
-          <a:fontRef idx="minor">
-            <a:schemeClr val="lt1"/>
-          </a:fontRef>
-        </p:style>
-        <p:txBody>
-          <a:bodyPr rtlCol="0" anchor="ctr"/>
-          <a:lstStyle/>
-          <a:p>
-            <a:pPr algn="ctr"/>
-            <a:endParaRPr lang="en-US"/>
-          </a:p>
-        </p:txBody>
-      </p:sp>
-      <p:sp>
-        <p:nvSpPr>
-          <p:cNvPr id="4" name="Date Placeholder 3">
-            <a:extLst>
-              <a:ext uri="{FF2B5EF4-FFF2-40B4-BE49-F238E27FC236}">
-                <a16:creationId xmlns:a16="http://schemas.microsoft.com/office/drawing/2014/main" id="{3C7A1789-611B-DDE1-311B-90CDD2EAF8BF}"/>
-              </a:ext>
-            </a:extLst>
-          </p:cNvPr>
-          <p:cNvSpPr>
-            <a:spLocks noGrp="1"/>
-          </p:cNvSpPr>
-          <p:nvPr>
-            <p:ph type="dt" sz="half" idx="10"/>
-          </p:nvPr>
-        </p:nvSpPr>
-        <p:spPr/>
-        <p:txBody>
-          <a:bodyPr/>
-          <a:lstStyle/>
-          <a:p>
-            <a:r>
-              <a:rPr lang="en-US"/>
-              <a:t>20th May, 2025</a:t>
-            </a:r>
-          </a:p>
-        </p:txBody>
-      </p:sp>
-      <p:sp>
-        <p:nvSpPr>
-          <p:cNvPr id="5" name="Footer Placeholder 4">
-            <a:extLst>
-              <a:ext uri="{FF2B5EF4-FFF2-40B4-BE49-F238E27FC236}">
-                <a16:creationId xmlns:a16="http://schemas.microsoft.com/office/drawing/2014/main" id="{D3D71FD5-7F71-C500-2C32-96B92F1F8F06}"/>
-              </a:ext>
-            </a:extLst>
-          </p:cNvPr>
-          <p:cNvSpPr>
-            <a:spLocks noGrp="1"/>
-          </p:cNvSpPr>
-          <p:nvPr>
-            <p:ph type="ftr" sz="quarter" idx="11"/>
-          </p:nvPr>
-        </p:nvSpPr>
-        <p:spPr/>
-        <p:txBody>
-          <a:bodyPr/>
-          <a:lstStyle/>
-          <a:p>
-            <a:r>
-              <a:rPr lang="en-US"/>
-              <a:t>QUDT Introduction</a:t>
-            </a:r>
-          </a:p>
-        </p:txBody>
-      </p:sp>
-      <p:sp>
-        <p:nvSpPr>
-          <p:cNvPr id="6" name="Slide Number Placeholder 5">
-            <a:extLst>
-              <a:ext uri="{FF2B5EF4-FFF2-40B4-BE49-F238E27FC236}">
-                <a16:creationId xmlns:a16="http://schemas.microsoft.com/office/drawing/2014/main" id="{A665E619-3C6B-DFD2-2E5B-19733D31F835}"/>
-              </a:ext>
-            </a:extLst>
-          </p:cNvPr>
-          <p:cNvSpPr>
-            <a:spLocks noGrp="1"/>
-          </p:cNvSpPr>
-          <p:nvPr>
-            <p:ph type="sldNum" sz="quarter" idx="12"/>
-          </p:nvPr>
-        </p:nvSpPr>
-        <p:spPr/>
-        <p:txBody>
-          <a:bodyPr/>
-          <a:lstStyle/>
-          <a:p>
-            <a:fld id="{E8B94566-E730-314F-8C05-3849AEE21A50}" type="slidenum">
-              <a:rPr lang="en-US" smtClean="0"/>
-              <a:t>13</a:t>
-            </a:fld>
-            <a:endParaRPr lang="en-US" dirty="0"/>
-          </a:p>
-        </p:txBody>
-      </p:sp>
-      <p:sp>
-        <p:nvSpPr>
-          <p:cNvPr id="2" name="TextBox 1">
-            <a:extLst>
-              <a:ext uri="{FF2B5EF4-FFF2-40B4-BE49-F238E27FC236}">
-                <a16:creationId xmlns:a16="http://schemas.microsoft.com/office/drawing/2014/main" id="{91C25C81-3A4A-6203-38EC-5ACB7977A7A3}"/>
-              </a:ext>
-            </a:extLst>
-          </p:cNvPr>
-          <p:cNvSpPr txBox="1"/>
-          <p:nvPr/>
-        </p:nvSpPr>
-        <p:spPr>
-          <a:xfrm>
-            <a:off x="1966623" y="5493220"/>
+            <a:off x="1966623" y="5075527"/>
             <a:ext cx="2071977" cy="461665"/>
           </a:xfrm>
           <a:prstGeom prst="rect">
@@ -4518,12 +4222,93 @@
           </a:p>
         </p:txBody>
       </p:sp>
+      <p:sp>
+        <p:nvSpPr>
+          <p:cNvPr id="9" name="TextBox 8">
+            <a:extLst>
+              <a:ext uri="{FF2B5EF4-FFF2-40B4-BE49-F238E27FC236}">
+                <a16:creationId xmlns:a16="http://schemas.microsoft.com/office/drawing/2014/main" id="{72DAEC07-948C-6DF8-340A-BB4DD0DCB742}"/>
+              </a:ext>
+            </a:extLst>
+          </p:cNvPr>
+          <p:cNvSpPr txBox="1"/>
+          <p:nvPr/>
+        </p:nvSpPr>
+        <p:spPr>
+          <a:xfrm>
+            <a:off x="7423709" y="5854528"/>
+            <a:ext cx="2743199" cy="461665"/>
+          </a:xfrm>
+          <a:prstGeom prst="rect">
+            <a:avLst/>
+          </a:prstGeom>
+          <a:noFill/>
+        </p:spPr>
+        <p:txBody>
+          <a:bodyPr wrap="square" rtlCol="0">
+            <a:spAutoFit/>
+          </a:bodyPr>
+          <a:lstStyle/>
+          <a:p>
+            <a:pPr algn="ctr"/>
+            <a:r>
+              <a:rPr lang="en-US" sz="2400" dirty="0"/>
+              <a:t> Google Scholar</a:t>
+            </a:r>
+          </a:p>
+        </p:txBody>
+      </p:sp>
+      <p:sp>
+        <p:nvSpPr>
+          <p:cNvPr id="10" name="Title 1">
+            <a:extLst>
+              <a:ext uri="{FF2B5EF4-FFF2-40B4-BE49-F238E27FC236}">
+                <a16:creationId xmlns:a16="http://schemas.microsoft.com/office/drawing/2014/main" id="{C70A5D00-93DA-9BDD-101E-C672558E510F}"/>
+              </a:ext>
+            </a:extLst>
+          </p:cNvPr>
+          <p:cNvSpPr>
+            <a:spLocks noGrp="1"/>
+          </p:cNvSpPr>
+          <p:nvPr>
+            <p:ph type="title"/>
+          </p:nvPr>
+        </p:nvSpPr>
+        <p:spPr>
+          <a:xfrm>
+            <a:off x="1689904" y="136526"/>
+            <a:ext cx="10309056" cy="1032518"/>
+          </a:xfrm>
+          <a:noFill/>
+          <a:ln w="19050">
+            <a:solidFill>
+              <a:schemeClr val="bg1"/>
+            </a:solidFill>
+          </a:ln>
+        </p:spPr>
+        <p:txBody>
+          <a:bodyPr>
+            <a:normAutofit/>
+          </a:bodyPr>
+          <a:lstStyle/>
+          <a:p>
+            <a:r>
+              <a:rPr lang="en-US" dirty="0">
+                <a:solidFill>
+                  <a:schemeClr val="tx2"/>
+                </a:solidFill>
+              </a:rPr>
+              <a:t>Interest trends</a:t>
+            </a:r>
+          </a:p>
+        </p:txBody>
+      </p:sp>
       <p:pic>
         <p:nvPicPr>
-          <p:cNvPr id="3" name="Picture 2">
-            <a:extLst>
-              <a:ext uri="{FF2B5EF4-FFF2-40B4-BE49-F238E27FC236}">
-                <a16:creationId xmlns:a16="http://schemas.microsoft.com/office/drawing/2014/main" id="{9C909800-7E46-EFFC-C614-0E935CA8FB2C}"/>
+          <p:cNvPr id="4" name="Picture 3">
+            <a:extLst>
+              <a:ext uri="{FF2B5EF4-FFF2-40B4-BE49-F238E27FC236}">
+                <a16:creationId xmlns:a16="http://schemas.microsoft.com/office/drawing/2014/main" id="{CA23DA97-3C3A-57E9-ECA4-28490E7D78B3}"/>
               </a:ext>
             </a:extLst>
           </p:cNvPr>
@@ -4540,196 +4325,58 @@
         </p:blipFill>
         <p:spPr>
           <a:xfrm>
-            <a:off x="6190191" y="2294753"/>
-            <a:ext cx="5251450" cy="3387373"/>
+            <a:off x="6148552" y="2284439"/>
+            <a:ext cx="5019740" cy="3476733"/>
           </a:xfrm>
           <a:prstGeom prst="rect">
             <a:avLst/>
           </a:prstGeom>
+          <a:ln w="50800">
+            <a:solidFill>
+              <a:schemeClr val="accent1"/>
+            </a:solidFill>
+          </a:ln>
         </p:spPr>
       </p:pic>
-      <p:sp>
-        <p:nvSpPr>
-          <p:cNvPr id="9" name="TextBox 8">
-            <a:extLst>
-              <a:ext uri="{FF2B5EF4-FFF2-40B4-BE49-F238E27FC236}">
-                <a16:creationId xmlns:a16="http://schemas.microsoft.com/office/drawing/2014/main" id="{72DAEC07-948C-6DF8-340A-BB4DD0DCB742}"/>
-              </a:ext>
-            </a:extLst>
-          </p:cNvPr>
-          <p:cNvSpPr txBox="1"/>
+      <p:pic>
+        <p:nvPicPr>
+          <p:cNvPr id="5" name="Picture 4">
+            <a:extLst>
+              <a:ext uri="{FF2B5EF4-FFF2-40B4-BE49-F238E27FC236}">
+                <a16:creationId xmlns:a16="http://schemas.microsoft.com/office/drawing/2014/main" id="{95468445-9EDC-622C-2DA3-E561A03C3FCF}"/>
+              </a:ext>
+            </a:extLst>
+          </p:cNvPr>
+          <p:cNvPicPr>
+            <a:picLocks noChangeAspect="1"/>
+          </p:cNvPicPr>
           <p:nvPr/>
-        </p:nvSpPr>
+        </p:nvPicPr>
+        <p:blipFill>
+          <a:blip r:embed="rId3"/>
+          <a:stretch>
+            <a:fillRect/>
+          </a:stretch>
+        </p:blipFill>
         <p:spPr>
           <a:xfrm>
-            <a:off x="7423709" y="5854528"/>
-            <a:ext cx="2743199" cy="461665"/>
+            <a:off x="444062" y="1482549"/>
+            <a:ext cx="5250443" cy="3535257"/>
           </a:xfrm>
           <a:prstGeom prst="rect">
             <a:avLst/>
           </a:prstGeom>
-          <a:noFill/>
-        </p:spPr>
-        <p:txBody>
-          <a:bodyPr wrap="square" rtlCol="0">
-            <a:spAutoFit/>
-          </a:bodyPr>
-          <a:lstStyle/>
-          <a:p>
-            <a:pPr algn="ctr"/>
-            <a:r>
-              <a:rPr lang="en-US" sz="2400" dirty="0"/>
-              <a:t> Google Scholar</a:t>
-            </a:r>
-          </a:p>
-        </p:txBody>
-      </p:sp>
-      <p:sp>
-        <p:nvSpPr>
-          <p:cNvPr id="10" name="Title 1">
-            <a:extLst>
-              <a:ext uri="{FF2B5EF4-FFF2-40B4-BE49-F238E27FC236}">
-                <a16:creationId xmlns:a16="http://schemas.microsoft.com/office/drawing/2014/main" id="{C70A5D00-93DA-9BDD-101E-C672558E510F}"/>
-              </a:ext>
-            </a:extLst>
-          </p:cNvPr>
-          <p:cNvSpPr>
-            <a:spLocks noGrp="1"/>
-          </p:cNvSpPr>
-          <p:nvPr>
-            <p:ph type="title"/>
-          </p:nvPr>
-        </p:nvSpPr>
-        <p:spPr>
-          <a:xfrm>
-            <a:off x="1689904" y="136526"/>
-            <a:ext cx="10309056" cy="1032518"/>
-          </a:xfrm>
-          <a:solidFill>
-            <a:srgbClr val="003746"/>
-          </a:solidFill>
-          <a:ln w="19050">
+          <a:ln w="50800">
             <a:solidFill>
-              <a:srgbClr val="00FF78"/>
+              <a:schemeClr val="accent1"/>
             </a:solidFill>
           </a:ln>
         </p:spPr>
-        <p:txBody>
-          <a:bodyPr>
-            <a:normAutofit/>
-          </a:bodyPr>
-          <a:lstStyle/>
-          <a:p>
-            <a:r>
-              <a:rPr lang="en-US" dirty="0"/>
-              <a:t>Interest Trends</a:t>
-            </a:r>
-          </a:p>
-        </p:txBody>
-      </p:sp>
-      <p:grpSp>
-        <p:nvGrpSpPr>
-          <p:cNvPr id="12" name="Group 11">
-            <a:extLst>
-              <a:ext uri="{FF2B5EF4-FFF2-40B4-BE49-F238E27FC236}">
-                <a16:creationId xmlns:a16="http://schemas.microsoft.com/office/drawing/2014/main" id="{112B0C5A-CF32-5CB5-B993-3A12DF6F2238}"/>
-              </a:ext>
-            </a:extLst>
-          </p:cNvPr>
-          <p:cNvGrpSpPr/>
-          <p:nvPr/>
-        </p:nvGrpSpPr>
-        <p:grpSpPr>
-          <a:xfrm>
-            <a:off x="619286" y="1437890"/>
-            <a:ext cx="4953612" cy="3982219"/>
-            <a:chOff x="619286" y="1454753"/>
-            <a:chExt cx="4953612" cy="3982219"/>
-          </a:xfrm>
-        </p:grpSpPr>
-        <p:sp>
-          <p:nvSpPr>
-            <p:cNvPr id="8" name="Rounded Rectangle 3">
-              <a:extLst>
-                <a:ext uri="{FF2B5EF4-FFF2-40B4-BE49-F238E27FC236}">
-                  <a16:creationId xmlns:a16="http://schemas.microsoft.com/office/drawing/2014/main" id="{94E9649F-69DB-0D60-7E1E-7B6CB905F27A}"/>
-                </a:ext>
-              </a:extLst>
-            </p:cNvPr>
-            <p:cNvSpPr/>
-            <p:nvPr/>
-          </p:nvSpPr>
-          <p:spPr>
-            <a:xfrm>
-              <a:off x="619286" y="1454753"/>
-              <a:ext cx="4953612" cy="3982219"/>
-            </a:xfrm>
-            <a:prstGeom prst="roundRect">
-              <a:avLst>
-                <a:gd name="adj" fmla="val 2754"/>
-              </a:avLst>
-            </a:prstGeom>
-          </p:spPr>
-          <p:style>
-            <a:lnRef idx="2">
-              <a:schemeClr val="accent1">
-                <a:shade val="15000"/>
-              </a:schemeClr>
-            </a:lnRef>
-            <a:fillRef idx="1">
-              <a:schemeClr val="accent1"/>
-            </a:fillRef>
-            <a:effectRef idx="0">
-              <a:schemeClr val="accent1"/>
-            </a:effectRef>
-            <a:fontRef idx="minor">
-              <a:schemeClr val="lt1"/>
-            </a:fontRef>
-          </p:style>
-          <p:txBody>
-            <a:bodyPr rtlCol="0" anchor="ctr"/>
-            <a:lstStyle/>
-            <a:p>
-              <a:pPr algn="ctr"/>
-              <a:endParaRPr lang="en-US"/>
-            </a:p>
-          </p:txBody>
-        </p:sp>
-        <p:pic>
-          <p:nvPicPr>
-            <p:cNvPr id="7" name="Picture 6" descr="A graph of a rising graph&#10;&#10;AI-generated content may be incorrect.">
-              <a:extLst>
-                <a:ext uri="{FF2B5EF4-FFF2-40B4-BE49-F238E27FC236}">
-                  <a16:creationId xmlns:a16="http://schemas.microsoft.com/office/drawing/2014/main" id="{B3B70ECF-0129-71A6-9B6D-7645B1DD29CC}"/>
-                </a:ext>
-              </a:extLst>
-            </p:cNvPr>
-            <p:cNvPicPr>
-              <a:picLocks noChangeAspect="1"/>
-            </p:cNvPicPr>
-            <p:nvPr/>
-          </p:nvPicPr>
-          <p:blipFill>
-            <a:blip r:embed="rId3"/>
-            <a:stretch>
-              <a:fillRect/>
-            </a:stretch>
-          </p:blipFill>
-          <p:spPr>
-            <a:xfrm>
-              <a:off x="750358" y="1527864"/>
-              <a:ext cx="4696179" cy="3792457"/>
-            </a:xfrm>
-            <a:prstGeom prst="rect">
-              <a:avLst/>
-            </a:prstGeom>
-          </p:spPr>
-        </p:pic>
-      </p:grpSp>
+      </p:pic>
     </p:spTree>
     <p:extLst>
       <p:ext uri="{BB962C8B-B14F-4D97-AF65-F5344CB8AC3E}">
-        <p14:creationId xmlns:p14="http://schemas.microsoft.com/office/powerpoint/2010/main" val="2854507445"/>
+        <p14:creationId xmlns:p14="http://schemas.microsoft.com/office/powerpoint/2010/main" val="2523262215"/>
       </p:ext>
     </p:extLst>
   </p:cSld>
@@ -4739,7 +4386,7 @@
 </p:sld>
 </file>
 
-<file path=ppt/slides/slide14.xml><?xml version="1.0" encoding="utf-8"?>
+<file path=ppt/slides/slide13.xml><?xml version="1.0" encoding="utf-8"?>
 <p:sld xmlns:a="http://schemas.openxmlformats.org/drawingml/2006/main" xmlns:r="http://schemas.openxmlformats.org/officeDocument/2006/relationships" xmlns:p="http://schemas.openxmlformats.org/presentationml/2006/main">
   <p:cSld>
     <p:spTree>
@@ -5178,10 +4825,67 @@
       </p:sp>
       <p:sp>
         <p:nvSpPr>
-          <p:cNvPr id="4" name="Date Placeholder 3">
-            <a:extLst>
-              <a:ext uri="{FF2B5EF4-FFF2-40B4-BE49-F238E27FC236}">
-                <a16:creationId xmlns:a16="http://schemas.microsoft.com/office/drawing/2014/main" id="{F9D5452B-6D74-35FB-16D2-B5A2896C2A5D}"/>
+          <p:cNvPr id="6" name="Footer Placeholder 5">
+            <a:extLst>
+              <a:ext uri="{FF2B5EF4-FFF2-40B4-BE49-F238E27FC236}">
+                <a16:creationId xmlns:a16="http://schemas.microsoft.com/office/drawing/2014/main" id="{3750B8AD-8A19-D7FA-420F-49AB917756A5}"/>
+              </a:ext>
+            </a:extLst>
+          </p:cNvPr>
+          <p:cNvSpPr>
+            <a:spLocks noGrp="1"/>
+          </p:cNvSpPr>
+          <p:nvPr>
+            <p:ph type="ftr" sz="quarter" idx="11"/>
+          </p:nvPr>
+        </p:nvSpPr>
+        <p:spPr/>
+        <p:txBody>
+          <a:bodyPr/>
+          <a:lstStyle/>
+          <a:p>
+            <a:r>
+              <a:rPr lang="en-US"/>
+              <a:t>QUDT Introduction</a:t>
+            </a:r>
+          </a:p>
+        </p:txBody>
+      </p:sp>
+      <p:sp>
+        <p:nvSpPr>
+          <p:cNvPr id="7" name="Slide Number Placeholder 6">
+            <a:extLst>
+              <a:ext uri="{FF2B5EF4-FFF2-40B4-BE49-F238E27FC236}">
+                <a16:creationId xmlns:a16="http://schemas.microsoft.com/office/drawing/2014/main" id="{B2398868-7911-7518-80AF-C84194723CD7}"/>
+              </a:ext>
+            </a:extLst>
+          </p:cNvPr>
+          <p:cNvSpPr>
+            <a:spLocks noGrp="1"/>
+          </p:cNvSpPr>
+          <p:nvPr>
+            <p:ph type="sldNum" sz="quarter" idx="12"/>
+          </p:nvPr>
+        </p:nvSpPr>
+        <p:spPr/>
+        <p:txBody>
+          <a:bodyPr/>
+          <a:lstStyle/>
+          <a:p>
+            <a:fld id="{E8B94566-E730-314F-8C05-3849AEE21A50}" type="slidenum">
+              <a:rPr lang="en-US" smtClean="0"/>
+              <a:t>13</a:t>
+            </a:fld>
+            <a:endParaRPr lang="en-US"/>
+          </a:p>
+        </p:txBody>
+      </p:sp>
+      <p:sp>
+        <p:nvSpPr>
+          <p:cNvPr id="8" name="Date Placeholder 2">
+            <a:extLst>
+              <a:ext uri="{FF2B5EF4-FFF2-40B4-BE49-F238E27FC236}">
+                <a16:creationId xmlns:a16="http://schemas.microsoft.com/office/drawing/2014/main" id="{EAFDBDCC-D58B-0836-D83A-D7B8A5EBF958}"/>
               </a:ext>
             </a:extLst>
           </p:cNvPr>
@@ -5192,72 +4896,20 @@
             <p:ph type="dt" sz="half" idx="10"/>
           </p:nvPr>
         </p:nvSpPr>
-        <p:spPr/>
+        <p:spPr>
+          <a:xfrm>
+            <a:off x="187219" y="6356350"/>
+            <a:ext cx="2743200" cy="365125"/>
+          </a:xfrm>
+        </p:spPr>
         <p:txBody>
           <a:bodyPr/>
           <a:lstStyle/>
           <a:p>
             <a:r>
-              <a:rPr lang="en-US"/>
-              <a:t>20th May, 2025</a:t>
-            </a:r>
-          </a:p>
-        </p:txBody>
-      </p:sp>
-      <p:sp>
-        <p:nvSpPr>
-          <p:cNvPr id="6" name="Footer Placeholder 5">
-            <a:extLst>
-              <a:ext uri="{FF2B5EF4-FFF2-40B4-BE49-F238E27FC236}">
-                <a16:creationId xmlns:a16="http://schemas.microsoft.com/office/drawing/2014/main" id="{3750B8AD-8A19-D7FA-420F-49AB917756A5}"/>
-              </a:ext>
-            </a:extLst>
-          </p:cNvPr>
-          <p:cNvSpPr>
-            <a:spLocks noGrp="1"/>
-          </p:cNvSpPr>
-          <p:nvPr>
-            <p:ph type="ftr" sz="quarter" idx="11"/>
-          </p:nvPr>
-        </p:nvSpPr>
-        <p:spPr/>
-        <p:txBody>
-          <a:bodyPr/>
-          <a:lstStyle/>
-          <a:p>
-            <a:r>
-              <a:rPr lang="en-US"/>
-              <a:t>QUDT Introduction</a:t>
-            </a:r>
-          </a:p>
-        </p:txBody>
-      </p:sp>
-      <p:sp>
-        <p:nvSpPr>
-          <p:cNvPr id="7" name="Slide Number Placeholder 6">
-            <a:extLst>
-              <a:ext uri="{FF2B5EF4-FFF2-40B4-BE49-F238E27FC236}">
-                <a16:creationId xmlns:a16="http://schemas.microsoft.com/office/drawing/2014/main" id="{B2398868-7911-7518-80AF-C84194723CD7}"/>
-              </a:ext>
-            </a:extLst>
-          </p:cNvPr>
-          <p:cNvSpPr>
-            <a:spLocks noGrp="1"/>
-          </p:cNvSpPr>
-          <p:nvPr>
-            <p:ph type="sldNum" sz="quarter" idx="12"/>
-          </p:nvPr>
-        </p:nvSpPr>
-        <p:spPr/>
-        <p:txBody>
-          <a:bodyPr/>
-          <a:lstStyle/>
-          <a:p>
-            <a:fld id="{E8B94566-E730-314F-8C05-3849AEE21A50}" type="slidenum">
-              <a:rPr lang="en-US" smtClean="0"/>
-              <a:t>14</a:t>
-            </a:fld>
-            <a:endParaRPr lang="en-US"/>
+              <a:rPr lang="en-US" dirty="0"/>
+              <a:t>8 May 2025</a:t>
+            </a:r>
           </a:p>
         </p:txBody>
       </p:sp>
@@ -5274,7 +4926,7 @@
 </p:sld>
 </file>
 
-<file path=ppt/slides/slide15.xml><?xml version="1.0" encoding="utf-8"?>
+<file path=ppt/slides/slide14.xml><?xml version="1.0" encoding="utf-8"?>
 <p:sld xmlns:a="http://schemas.openxmlformats.org/drawingml/2006/main" xmlns:r="http://schemas.openxmlformats.org/officeDocument/2006/relationships" xmlns:p="http://schemas.openxmlformats.org/presentationml/2006/main">
   <p:cSld>
     <p:spTree>
@@ -5538,34 +5190,6 @@
       </p:sp>
       <p:sp>
         <p:nvSpPr>
-          <p:cNvPr id="4" name="Date Placeholder 3">
-            <a:extLst>
-              <a:ext uri="{FF2B5EF4-FFF2-40B4-BE49-F238E27FC236}">
-                <a16:creationId xmlns:a16="http://schemas.microsoft.com/office/drawing/2014/main" id="{08181457-3C57-A275-8C7F-6A81D0D7C95A}"/>
-              </a:ext>
-            </a:extLst>
-          </p:cNvPr>
-          <p:cNvSpPr>
-            <a:spLocks noGrp="1"/>
-          </p:cNvSpPr>
-          <p:nvPr>
-            <p:ph type="dt" sz="half" idx="10"/>
-          </p:nvPr>
-        </p:nvSpPr>
-        <p:spPr/>
-        <p:txBody>
-          <a:bodyPr/>
-          <a:lstStyle/>
-          <a:p>
-            <a:r>
-              <a:rPr lang="en-US"/>
-              <a:t>20th May, 2025</a:t>
-            </a:r>
-          </a:p>
-        </p:txBody>
-      </p:sp>
-      <p:sp>
-        <p:nvSpPr>
           <p:cNvPr id="6" name="Footer Placeholder 5">
             <a:extLst>
               <a:ext uri="{FF2B5EF4-FFF2-40B4-BE49-F238E27FC236}">
@@ -5615,7 +5239,7 @@
           <a:p>
             <a:fld id="{E8B94566-E730-314F-8C05-3849AEE21A50}" type="slidenum">
               <a:rPr lang="en-US" smtClean="0"/>
-              <a:t>15</a:t>
+              <a:t>14</a:t>
             </a:fld>
             <a:endParaRPr lang="en-US"/>
           </a:p>
@@ -5720,6 +5344,39 @@
           </p:spPr>
         </p:pic>
       </p:grpSp>
+      <p:sp>
+        <p:nvSpPr>
+          <p:cNvPr id="10" name="Date Placeholder 2">
+            <a:extLst>
+              <a:ext uri="{FF2B5EF4-FFF2-40B4-BE49-F238E27FC236}">
+                <a16:creationId xmlns:a16="http://schemas.microsoft.com/office/drawing/2014/main" id="{B5A9975A-DC19-84FE-3165-3CC3E611569C}"/>
+              </a:ext>
+            </a:extLst>
+          </p:cNvPr>
+          <p:cNvSpPr>
+            <a:spLocks noGrp="1"/>
+          </p:cNvSpPr>
+          <p:nvPr>
+            <p:ph type="dt" sz="half" idx="10"/>
+          </p:nvPr>
+        </p:nvSpPr>
+        <p:spPr>
+          <a:xfrm>
+            <a:off x="187219" y="6356350"/>
+            <a:ext cx="2743200" cy="365125"/>
+          </a:xfrm>
+        </p:spPr>
+        <p:txBody>
+          <a:bodyPr/>
+          <a:lstStyle/>
+          <a:p>
+            <a:r>
+              <a:rPr lang="en-US" dirty="0"/>
+              <a:t>8 May 2025</a:t>
+            </a:r>
+          </a:p>
+        </p:txBody>
+      </p:sp>
     </p:spTree>
     <p:extLst>
       <p:ext uri="{BB962C8B-B14F-4D97-AF65-F5344CB8AC3E}">
@@ -5733,7 +5390,7 @@
 </p:sld>
 </file>
 
-<file path=ppt/slides/slide16.xml><?xml version="1.0" encoding="utf-8"?>
+<file path=ppt/slides/slide15.xml><?xml version="1.0" encoding="utf-8"?>
 <p:sld xmlns:a="http://schemas.openxmlformats.org/drawingml/2006/main" xmlns:r="http://schemas.openxmlformats.org/officeDocument/2006/relationships" xmlns:p="http://schemas.openxmlformats.org/presentationml/2006/main">
   <p:cSld>
     <p:spTree>
@@ -5997,34 +5654,6 @@
       </p:sp>
       <p:sp>
         <p:nvSpPr>
-          <p:cNvPr id="4" name="Date Placeholder 3">
-            <a:extLst>
-              <a:ext uri="{FF2B5EF4-FFF2-40B4-BE49-F238E27FC236}">
-                <a16:creationId xmlns:a16="http://schemas.microsoft.com/office/drawing/2014/main" id="{68684714-C9FC-4806-398C-0F5FDA6AF923}"/>
-              </a:ext>
-            </a:extLst>
-          </p:cNvPr>
-          <p:cNvSpPr>
-            <a:spLocks noGrp="1"/>
-          </p:cNvSpPr>
-          <p:nvPr>
-            <p:ph type="dt" sz="half" idx="10"/>
-          </p:nvPr>
-        </p:nvSpPr>
-        <p:spPr/>
-        <p:txBody>
-          <a:bodyPr/>
-          <a:lstStyle/>
-          <a:p>
-            <a:r>
-              <a:rPr lang="en-US"/>
-              <a:t>20th May, 2025</a:t>
-            </a:r>
-          </a:p>
-        </p:txBody>
-      </p:sp>
-      <p:sp>
-        <p:nvSpPr>
           <p:cNvPr id="6" name="Footer Placeholder 5">
             <a:extLst>
               <a:ext uri="{FF2B5EF4-FFF2-40B4-BE49-F238E27FC236}">
@@ -6074,7 +5703,7 @@
           <a:p>
             <a:fld id="{E8B94566-E730-314F-8C05-3849AEE21A50}" type="slidenum">
               <a:rPr lang="en-US" smtClean="0"/>
-              <a:t>16</a:t>
+              <a:t>15</a:t>
             </a:fld>
             <a:endParaRPr lang="en-US"/>
           </a:p>
@@ -6179,6 +5808,39 @@
           </p:spPr>
         </p:pic>
       </p:grpSp>
+      <p:sp>
+        <p:nvSpPr>
+          <p:cNvPr id="10" name="Date Placeholder 2">
+            <a:extLst>
+              <a:ext uri="{FF2B5EF4-FFF2-40B4-BE49-F238E27FC236}">
+                <a16:creationId xmlns:a16="http://schemas.microsoft.com/office/drawing/2014/main" id="{0BA1BF3C-405B-3EB8-D6EB-E8A46AADCC81}"/>
+              </a:ext>
+            </a:extLst>
+          </p:cNvPr>
+          <p:cNvSpPr>
+            <a:spLocks noGrp="1"/>
+          </p:cNvSpPr>
+          <p:nvPr>
+            <p:ph type="dt" sz="half" idx="10"/>
+          </p:nvPr>
+        </p:nvSpPr>
+        <p:spPr>
+          <a:xfrm>
+            <a:off x="187219" y="6356350"/>
+            <a:ext cx="2743200" cy="365125"/>
+          </a:xfrm>
+        </p:spPr>
+        <p:txBody>
+          <a:bodyPr/>
+          <a:lstStyle/>
+          <a:p>
+            <a:r>
+              <a:rPr lang="en-US" dirty="0"/>
+              <a:t>8 May 2025</a:t>
+            </a:r>
+          </a:p>
+        </p:txBody>
+      </p:sp>
     </p:spTree>
     <p:extLst>
       <p:ext uri="{BB962C8B-B14F-4D97-AF65-F5344CB8AC3E}">
@@ -6192,7 +5854,7 @@
 </p:sld>
 </file>
 
-<file path=ppt/slides/slide17.xml><?xml version="1.0" encoding="utf-8"?>
+<file path=ppt/slides/slide16.xml><?xml version="1.0" encoding="utf-8"?>
 <p:sld xmlns:a="http://schemas.openxmlformats.org/drawingml/2006/main" xmlns:r="http://schemas.openxmlformats.org/officeDocument/2006/relationships" xmlns:p="http://schemas.openxmlformats.org/presentationml/2006/main">
   <p:cSld>
     <p:spTree>
@@ -6370,39 +6032,6 @@
       </p:sp>
       <p:sp>
         <p:nvSpPr>
-          <p:cNvPr id="8" name="Date Placeholder 7">
-            <a:extLst>
-              <a:ext uri="{FF2B5EF4-FFF2-40B4-BE49-F238E27FC236}">
-                <a16:creationId xmlns:a16="http://schemas.microsoft.com/office/drawing/2014/main" id="{BC810DEE-68C7-CC7A-7182-E60F501FF58D}"/>
-              </a:ext>
-            </a:extLst>
-          </p:cNvPr>
-          <p:cNvSpPr>
-            <a:spLocks noGrp="1"/>
-          </p:cNvSpPr>
-          <p:nvPr>
-            <p:ph type="dt" sz="half" idx="10"/>
-          </p:nvPr>
-        </p:nvSpPr>
-        <p:spPr>
-          <a:xfrm>
-            <a:off x="185468" y="6492875"/>
-            <a:ext cx="2743200" cy="365125"/>
-          </a:xfrm>
-        </p:spPr>
-        <p:txBody>
-          <a:bodyPr/>
-          <a:lstStyle/>
-          <a:p>
-            <a:r>
-              <a:rPr lang="en-US"/>
-              <a:t>20th May, 2025</a:t>
-            </a:r>
-          </a:p>
-        </p:txBody>
-      </p:sp>
-      <p:sp>
-        <p:nvSpPr>
           <p:cNvPr id="9" name="Footer Placeholder 8">
             <a:extLst>
               <a:ext uri="{FF2B5EF4-FFF2-40B4-BE49-F238E27FC236}">
@@ -6462,7 +6091,7 @@
           <a:p>
             <a:fld id="{E8B94566-E730-314F-8C05-3849AEE21A50}" type="slidenum">
               <a:rPr lang="en-US" smtClean="0"/>
-              <a:t>17</a:t>
+              <a:t>16</a:t>
             </a:fld>
             <a:endParaRPr lang="en-US"/>
           </a:p>
@@ -6677,10 +6306,277 @@
           </a:p>
         </p:txBody>
       </p:sp>
+      <p:sp>
+        <p:nvSpPr>
+          <p:cNvPr id="5" name="Date Placeholder 2">
+            <a:extLst>
+              <a:ext uri="{FF2B5EF4-FFF2-40B4-BE49-F238E27FC236}">
+                <a16:creationId xmlns:a16="http://schemas.microsoft.com/office/drawing/2014/main" id="{19D78CB1-10FB-3C6D-5323-8B02530AECDC}"/>
+              </a:ext>
+            </a:extLst>
+          </p:cNvPr>
+          <p:cNvSpPr>
+            <a:spLocks noGrp="1"/>
+          </p:cNvSpPr>
+          <p:nvPr>
+            <p:ph type="dt" sz="half" idx="10"/>
+          </p:nvPr>
+        </p:nvSpPr>
+        <p:spPr>
+          <a:xfrm>
+            <a:off x="187219" y="6356350"/>
+            <a:ext cx="2743200" cy="365125"/>
+          </a:xfrm>
+        </p:spPr>
+        <p:txBody>
+          <a:bodyPr/>
+          <a:lstStyle/>
+          <a:p>
+            <a:r>
+              <a:rPr lang="en-US" dirty="0"/>
+              <a:t>8 May 2025</a:t>
+            </a:r>
+          </a:p>
+        </p:txBody>
+      </p:sp>
     </p:spTree>
     <p:extLst>
       <p:ext uri="{BB962C8B-B14F-4D97-AF65-F5344CB8AC3E}">
         <p14:creationId xmlns:p14="http://schemas.microsoft.com/office/powerpoint/2010/main" val="3790776456"/>
+      </p:ext>
+    </p:extLst>
+  </p:cSld>
+  <p:clrMapOvr>
+    <a:masterClrMapping/>
+  </p:clrMapOvr>
+</p:sld>
+</file>
+
+<file path=ppt/slides/slide17.xml><?xml version="1.0" encoding="utf-8"?>
+<p:sld xmlns:a="http://schemas.openxmlformats.org/drawingml/2006/main" xmlns:r="http://schemas.openxmlformats.org/officeDocument/2006/relationships" xmlns:p="http://schemas.openxmlformats.org/presentationml/2006/main">
+  <p:cSld>
+    <p:spTree>
+      <p:nvGrpSpPr>
+        <p:cNvPr id="1" name=""/>
+        <p:cNvGrpSpPr/>
+        <p:nvPr/>
+      </p:nvGrpSpPr>
+      <p:grpSpPr>
+        <a:xfrm>
+          <a:off x="0" y="0"/>
+          <a:ext cx="0" cy="0"/>
+          <a:chOff x="0" y="0"/>
+          <a:chExt cx="0" cy="0"/>
+        </a:xfrm>
+      </p:grpSpPr>
+      <p:sp>
+        <p:nvSpPr>
+          <p:cNvPr id="2" name="Title 1">
+            <a:extLst>
+              <a:ext uri="{FF2B5EF4-FFF2-40B4-BE49-F238E27FC236}">
+                <a16:creationId xmlns:a16="http://schemas.microsoft.com/office/drawing/2014/main" id="{54FCD156-57BA-747E-8D8D-6B3E34352F46}"/>
+              </a:ext>
+            </a:extLst>
+          </p:cNvPr>
+          <p:cNvSpPr>
+            <a:spLocks noGrp="1"/>
+          </p:cNvSpPr>
+          <p:nvPr>
+            <p:ph type="title"/>
+          </p:nvPr>
+        </p:nvSpPr>
+        <p:spPr>
+          <a:xfrm>
+            <a:off x="1101750" y="2359386"/>
+            <a:ext cx="10249888" cy="1163722"/>
+          </a:xfrm>
+        </p:spPr>
+        <p:txBody>
+          <a:bodyPr>
+            <a:normAutofit/>
+          </a:bodyPr>
+          <a:lstStyle/>
+          <a:p>
+            <a:pPr algn="ctr"/>
+            <a:r>
+              <a:rPr lang="en-US" sz="4800" dirty="0">
+                <a:ea typeface="Calibri"/>
+                <a:cs typeface="Calibri"/>
+              </a:rPr>
+              <a:t>Thank You</a:t>
+            </a:r>
+          </a:p>
+        </p:txBody>
+      </p:sp>
+      <p:sp>
+        <p:nvSpPr>
+          <p:cNvPr id="7" name="TextBox 6">
+            <a:extLst>
+              <a:ext uri="{FF2B5EF4-FFF2-40B4-BE49-F238E27FC236}">
+                <a16:creationId xmlns:a16="http://schemas.microsoft.com/office/drawing/2014/main" id="{9B92B04B-10EF-666E-F1D5-24642FCC5BF4}"/>
+              </a:ext>
+            </a:extLst>
+          </p:cNvPr>
+          <p:cNvSpPr txBox="1"/>
+          <p:nvPr/>
+        </p:nvSpPr>
+        <p:spPr>
+          <a:xfrm>
+            <a:off x="3638525" y="4722410"/>
+            <a:ext cx="4518053" cy="1508105"/>
+          </a:xfrm>
+          <a:prstGeom prst="rect">
+            <a:avLst/>
+          </a:prstGeom>
+          <a:noFill/>
+        </p:spPr>
+        <p:txBody>
+          <a:bodyPr rot="0" spcFirstLastPara="0" vertOverflow="overflow" horzOverflow="overflow" vert="horz" wrap="square" lIns="91440" tIns="45720" rIns="91440" bIns="45720" numCol="1" spcCol="0" rtlCol="0" fromWordArt="0" anchor="t" anchorCtr="0" forceAA="0" compatLnSpc="1">
+            <a:prstTxWarp prst="textNoShape">
+              <a:avLst/>
+            </a:prstTxWarp>
+            <a:spAutoFit/>
+          </a:bodyPr>
+          <a:lstStyle/>
+          <a:p>
+            <a:pPr algn="ctr"/>
+            <a:r>
+              <a:rPr lang="en-US" sz="3200">
+                <a:ea typeface="Calibri"/>
+                <a:cs typeface="Calibri"/>
+              </a:rPr>
+              <a:t>Contact us at:</a:t>
+            </a:r>
+            <a:endParaRPr lang="en-US" sz="2800"/>
+          </a:p>
+          <a:p>
+            <a:pPr algn="ctr"/>
+            <a:r>
+              <a:rPr lang="en-US" sz="3200" b="1" u="sng" dirty="0">
+                <a:solidFill>
+                  <a:srgbClr val="0097A7"/>
+                </a:solidFill>
+                <a:ea typeface="Calibri"/>
+                <a:cs typeface="Calibri"/>
+                <a:hlinkClick r:id="rId2"/>
+              </a:rPr>
+              <a:t>info@qudt</a:t>
+            </a:r>
+            <a:r>
+              <a:rPr lang="en-US" sz="2800">
+                <a:solidFill>
+                  <a:srgbClr val="000000"/>
+                </a:solidFill>
+                <a:ea typeface="Calibri"/>
+                <a:cs typeface="Calibri"/>
+              </a:rPr>
+              <a:t>.org</a:t>
+            </a:r>
+            <a:endParaRPr lang="en-US" sz="2800"/>
+          </a:p>
+          <a:p>
+            <a:pPr algn="l"/>
+            <a:endParaRPr lang="en-US" sz="2800" dirty="0">
+              <a:ea typeface="Calibri"/>
+              <a:cs typeface="Calibri"/>
+            </a:endParaRPr>
+          </a:p>
+        </p:txBody>
+      </p:sp>
+      <p:sp>
+        <p:nvSpPr>
+          <p:cNvPr id="4" name="Footer Placeholder 3">
+            <a:extLst>
+              <a:ext uri="{FF2B5EF4-FFF2-40B4-BE49-F238E27FC236}">
+                <a16:creationId xmlns:a16="http://schemas.microsoft.com/office/drawing/2014/main" id="{6F2CF90F-D97D-9DFC-CB1E-B8D1B986B51B}"/>
+              </a:ext>
+            </a:extLst>
+          </p:cNvPr>
+          <p:cNvSpPr>
+            <a:spLocks noGrp="1"/>
+          </p:cNvSpPr>
+          <p:nvPr>
+            <p:ph type="ftr" sz="quarter" idx="11"/>
+          </p:nvPr>
+        </p:nvSpPr>
+        <p:spPr/>
+        <p:txBody>
+          <a:bodyPr/>
+          <a:lstStyle/>
+          <a:p>
+            <a:r>
+              <a:rPr lang="en-US"/>
+              <a:t>QUDT Introduction</a:t>
+            </a:r>
+          </a:p>
+        </p:txBody>
+      </p:sp>
+      <p:sp>
+        <p:nvSpPr>
+          <p:cNvPr id="5" name="Slide Number Placeholder 4">
+            <a:extLst>
+              <a:ext uri="{FF2B5EF4-FFF2-40B4-BE49-F238E27FC236}">
+                <a16:creationId xmlns:a16="http://schemas.microsoft.com/office/drawing/2014/main" id="{0B59FDD6-A83E-3F4D-E9EF-47333F76EEBD}"/>
+              </a:ext>
+            </a:extLst>
+          </p:cNvPr>
+          <p:cNvSpPr>
+            <a:spLocks noGrp="1"/>
+          </p:cNvSpPr>
+          <p:nvPr>
+            <p:ph type="sldNum" sz="quarter" idx="12"/>
+          </p:nvPr>
+        </p:nvSpPr>
+        <p:spPr/>
+        <p:txBody>
+          <a:bodyPr/>
+          <a:lstStyle/>
+          <a:p>
+            <a:fld id="{E8B94566-E730-314F-8C05-3849AEE21A50}" type="slidenum">
+              <a:rPr lang="en-US" smtClean="0"/>
+              <a:t>17</a:t>
+            </a:fld>
+            <a:endParaRPr lang="en-US"/>
+          </a:p>
+        </p:txBody>
+      </p:sp>
+      <p:sp>
+        <p:nvSpPr>
+          <p:cNvPr id="6" name="Date Placeholder 2">
+            <a:extLst>
+              <a:ext uri="{FF2B5EF4-FFF2-40B4-BE49-F238E27FC236}">
+                <a16:creationId xmlns:a16="http://schemas.microsoft.com/office/drawing/2014/main" id="{70AC3184-B368-F6A2-F49E-CECFD161DF1B}"/>
+              </a:ext>
+            </a:extLst>
+          </p:cNvPr>
+          <p:cNvSpPr>
+            <a:spLocks noGrp="1"/>
+          </p:cNvSpPr>
+          <p:nvPr>
+            <p:ph type="dt" sz="half" idx="10"/>
+          </p:nvPr>
+        </p:nvSpPr>
+        <p:spPr>
+          <a:xfrm>
+            <a:off x="187219" y="6356350"/>
+            <a:ext cx="2743200" cy="365125"/>
+          </a:xfrm>
+        </p:spPr>
+        <p:txBody>
+          <a:bodyPr/>
+          <a:lstStyle/>
+          <a:p>
+            <a:r>
+              <a:rPr lang="en-US" dirty="0"/>
+              <a:t>8 May 2025</a:t>
+            </a:r>
+          </a:p>
+        </p:txBody>
+      </p:sp>
+    </p:spTree>
+    <p:extLst>
+      <p:ext uri="{BB962C8B-B14F-4D97-AF65-F5344CB8AC3E}">
+        <p14:creationId xmlns:p14="http://schemas.microsoft.com/office/powerpoint/2010/main" val="1847253826"/>
       </p:ext>
     </p:extLst>
   </p:cSld>
@@ -6712,235 +6608,6 @@
           <p:cNvPr id="2" name="Title 1">
             <a:extLst>
               <a:ext uri="{FF2B5EF4-FFF2-40B4-BE49-F238E27FC236}">
-                <a16:creationId xmlns:a16="http://schemas.microsoft.com/office/drawing/2014/main" id="{54FCD156-57BA-747E-8D8D-6B3E34352F46}"/>
-              </a:ext>
-            </a:extLst>
-          </p:cNvPr>
-          <p:cNvSpPr>
-            <a:spLocks noGrp="1"/>
-          </p:cNvSpPr>
-          <p:nvPr>
-            <p:ph type="title"/>
-          </p:nvPr>
-        </p:nvSpPr>
-        <p:spPr>
-          <a:xfrm>
-            <a:off x="1101750" y="2359386"/>
-            <a:ext cx="10249888" cy="1163722"/>
-          </a:xfrm>
-        </p:spPr>
-        <p:txBody>
-          <a:bodyPr>
-            <a:normAutofit/>
-          </a:bodyPr>
-          <a:lstStyle/>
-          <a:p>
-            <a:pPr algn="ctr"/>
-            <a:r>
-              <a:rPr lang="en-US" sz="4800" dirty="0">
-                <a:ea typeface="Calibri"/>
-                <a:cs typeface="Calibri"/>
-              </a:rPr>
-              <a:t>Thank You</a:t>
-            </a:r>
-          </a:p>
-        </p:txBody>
-      </p:sp>
-      <p:sp>
-        <p:nvSpPr>
-          <p:cNvPr id="7" name="TextBox 6">
-            <a:extLst>
-              <a:ext uri="{FF2B5EF4-FFF2-40B4-BE49-F238E27FC236}">
-                <a16:creationId xmlns:a16="http://schemas.microsoft.com/office/drawing/2014/main" id="{9B92B04B-10EF-666E-F1D5-24642FCC5BF4}"/>
-              </a:ext>
-            </a:extLst>
-          </p:cNvPr>
-          <p:cNvSpPr txBox="1"/>
-          <p:nvPr/>
-        </p:nvSpPr>
-        <p:spPr>
-          <a:xfrm>
-            <a:off x="3638525" y="4722410"/>
-            <a:ext cx="4518053" cy="1508105"/>
-          </a:xfrm>
-          <a:prstGeom prst="rect">
-            <a:avLst/>
-          </a:prstGeom>
-          <a:noFill/>
-        </p:spPr>
-        <p:txBody>
-          <a:bodyPr rot="0" spcFirstLastPara="0" vertOverflow="overflow" horzOverflow="overflow" vert="horz" wrap="square" lIns="91440" tIns="45720" rIns="91440" bIns="45720" numCol="1" spcCol="0" rtlCol="0" fromWordArt="0" anchor="t" anchorCtr="0" forceAA="0" compatLnSpc="1">
-            <a:prstTxWarp prst="textNoShape">
-              <a:avLst/>
-            </a:prstTxWarp>
-            <a:spAutoFit/>
-          </a:bodyPr>
-          <a:lstStyle/>
-          <a:p>
-            <a:pPr algn="ctr"/>
-            <a:r>
-              <a:rPr lang="en-US" sz="3200">
-                <a:ea typeface="Calibri"/>
-                <a:cs typeface="Calibri"/>
-              </a:rPr>
-              <a:t>Contact us at:</a:t>
-            </a:r>
-            <a:endParaRPr lang="en-US" sz="2800"/>
-          </a:p>
-          <a:p>
-            <a:pPr algn="ctr"/>
-            <a:r>
-              <a:rPr lang="en-US" sz="3200" b="1" u="sng" dirty="0">
-                <a:solidFill>
-                  <a:srgbClr val="0097A7"/>
-                </a:solidFill>
-                <a:ea typeface="Calibri"/>
-                <a:cs typeface="Calibri"/>
-                <a:hlinkClick r:id="rId2"/>
-              </a:rPr>
-              <a:t>info@qudt</a:t>
-            </a:r>
-            <a:r>
-              <a:rPr lang="en-US" sz="2800">
-                <a:solidFill>
-                  <a:srgbClr val="000000"/>
-                </a:solidFill>
-                <a:ea typeface="Calibri"/>
-                <a:cs typeface="Calibri"/>
-              </a:rPr>
-              <a:t>.org</a:t>
-            </a:r>
-            <a:endParaRPr lang="en-US" sz="2800"/>
-          </a:p>
-          <a:p>
-            <a:pPr algn="l"/>
-            <a:endParaRPr lang="en-US" sz="2800" dirty="0">
-              <a:ea typeface="Calibri"/>
-              <a:cs typeface="Calibri"/>
-            </a:endParaRPr>
-          </a:p>
-        </p:txBody>
-      </p:sp>
-      <p:sp>
-        <p:nvSpPr>
-          <p:cNvPr id="3" name="Date Placeholder 2">
-            <a:extLst>
-              <a:ext uri="{FF2B5EF4-FFF2-40B4-BE49-F238E27FC236}">
-                <a16:creationId xmlns:a16="http://schemas.microsoft.com/office/drawing/2014/main" id="{C98E8E19-E9EE-1A91-C924-C119BF0E8558}"/>
-              </a:ext>
-            </a:extLst>
-          </p:cNvPr>
-          <p:cNvSpPr>
-            <a:spLocks noGrp="1"/>
-          </p:cNvSpPr>
-          <p:nvPr>
-            <p:ph type="dt" sz="half" idx="10"/>
-          </p:nvPr>
-        </p:nvSpPr>
-        <p:spPr/>
-        <p:txBody>
-          <a:bodyPr/>
-          <a:lstStyle/>
-          <a:p>
-            <a:r>
-              <a:rPr lang="en-US"/>
-              <a:t>20th May, 2025</a:t>
-            </a:r>
-          </a:p>
-        </p:txBody>
-      </p:sp>
-      <p:sp>
-        <p:nvSpPr>
-          <p:cNvPr id="4" name="Footer Placeholder 3">
-            <a:extLst>
-              <a:ext uri="{FF2B5EF4-FFF2-40B4-BE49-F238E27FC236}">
-                <a16:creationId xmlns:a16="http://schemas.microsoft.com/office/drawing/2014/main" id="{6F2CF90F-D97D-9DFC-CB1E-B8D1B986B51B}"/>
-              </a:ext>
-            </a:extLst>
-          </p:cNvPr>
-          <p:cNvSpPr>
-            <a:spLocks noGrp="1"/>
-          </p:cNvSpPr>
-          <p:nvPr>
-            <p:ph type="ftr" sz="quarter" idx="11"/>
-          </p:nvPr>
-        </p:nvSpPr>
-        <p:spPr/>
-        <p:txBody>
-          <a:bodyPr/>
-          <a:lstStyle/>
-          <a:p>
-            <a:r>
-              <a:rPr lang="en-US"/>
-              <a:t>QUDT Introduction</a:t>
-            </a:r>
-          </a:p>
-        </p:txBody>
-      </p:sp>
-      <p:sp>
-        <p:nvSpPr>
-          <p:cNvPr id="5" name="Slide Number Placeholder 4">
-            <a:extLst>
-              <a:ext uri="{FF2B5EF4-FFF2-40B4-BE49-F238E27FC236}">
-                <a16:creationId xmlns:a16="http://schemas.microsoft.com/office/drawing/2014/main" id="{0B59FDD6-A83E-3F4D-E9EF-47333F76EEBD}"/>
-              </a:ext>
-            </a:extLst>
-          </p:cNvPr>
-          <p:cNvSpPr>
-            <a:spLocks noGrp="1"/>
-          </p:cNvSpPr>
-          <p:nvPr>
-            <p:ph type="sldNum" sz="quarter" idx="12"/>
-          </p:nvPr>
-        </p:nvSpPr>
-        <p:spPr/>
-        <p:txBody>
-          <a:bodyPr/>
-          <a:lstStyle/>
-          <a:p>
-            <a:fld id="{E8B94566-E730-314F-8C05-3849AEE21A50}" type="slidenum">
-              <a:rPr lang="en-US" smtClean="0"/>
-              <a:t>18</a:t>
-            </a:fld>
-            <a:endParaRPr lang="en-US"/>
-          </a:p>
-        </p:txBody>
-      </p:sp>
-    </p:spTree>
-    <p:extLst>
-      <p:ext uri="{BB962C8B-B14F-4D97-AF65-F5344CB8AC3E}">
-        <p14:creationId xmlns:p14="http://schemas.microsoft.com/office/powerpoint/2010/main" val="1847253826"/>
-      </p:ext>
-    </p:extLst>
-  </p:cSld>
-  <p:clrMapOvr>
-    <a:masterClrMapping/>
-  </p:clrMapOvr>
-</p:sld>
-</file>
-
-<file path=ppt/slides/slide19.xml><?xml version="1.0" encoding="utf-8"?>
-<p:sld xmlns:a="http://schemas.openxmlformats.org/drawingml/2006/main" xmlns:r="http://schemas.openxmlformats.org/officeDocument/2006/relationships" xmlns:p="http://schemas.openxmlformats.org/presentationml/2006/main">
-  <p:cSld>
-    <p:spTree>
-      <p:nvGrpSpPr>
-        <p:cNvPr id="1" name=""/>
-        <p:cNvGrpSpPr/>
-        <p:nvPr/>
-      </p:nvGrpSpPr>
-      <p:grpSpPr>
-        <a:xfrm>
-          <a:off x="0" y="0"/>
-          <a:ext cx="0" cy="0"/>
-          <a:chOff x="0" y="0"/>
-          <a:chExt cx="0" cy="0"/>
-        </a:xfrm>
-      </p:grpSpPr>
-      <p:sp>
-        <p:nvSpPr>
-          <p:cNvPr id="2" name="Title 1">
-            <a:extLst>
-              <a:ext uri="{FF2B5EF4-FFF2-40B4-BE49-F238E27FC236}">
                 <a16:creationId xmlns:a16="http://schemas.microsoft.com/office/drawing/2014/main" id="{CD177A3A-670D-4CB3-8E64-3472AE9CF97D}"/>
               </a:ext>
             </a:extLst>
@@ -7117,34 +6784,6 @@
       </p:sp>
       <p:sp>
         <p:nvSpPr>
-          <p:cNvPr id="4" name="Date Placeholder 3">
-            <a:extLst>
-              <a:ext uri="{FF2B5EF4-FFF2-40B4-BE49-F238E27FC236}">
-                <a16:creationId xmlns:a16="http://schemas.microsoft.com/office/drawing/2014/main" id="{603A6100-D34C-90D6-2AEB-C0C1A253527B}"/>
-              </a:ext>
-            </a:extLst>
-          </p:cNvPr>
-          <p:cNvSpPr>
-            <a:spLocks noGrp="1"/>
-          </p:cNvSpPr>
-          <p:nvPr>
-            <p:ph type="dt" sz="half" idx="10"/>
-          </p:nvPr>
-        </p:nvSpPr>
-        <p:spPr/>
-        <p:txBody>
-          <a:bodyPr/>
-          <a:lstStyle/>
-          <a:p>
-            <a:r>
-              <a:rPr lang="en-US"/>
-              <a:t>20th May, 2025</a:t>
-            </a:r>
-          </a:p>
-        </p:txBody>
-      </p:sp>
-      <p:sp>
-        <p:nvSpPr>
           <p:cNvPr id="5" name="Footer Placeholder 4">
             <a:extLst>
               <a:ext uri="{FF2B5EF4-FFF2-40B4-BE49-F238E27FC236}">
@@ -7194,7 +6833,7 @@
           <a:p>
             <a:fld id="{E8B94566-E730-314F-8C05-3849AEE21A50}" type="slidenum">
               <a:rPr lang="en-US" smtClean="0"/>
-              <a:t>19</a:t>
+              <a:t>18</a:t>
             </a:fld>
             <a:endParaRPr lang="en-US"/>
           </a:p>
@@ -7213,241 +6852,7 @@
 </p:sld>
 </file>
 
-<file path=ppt/slides/slide2.xml><?xml version="1.0" encoding="utf-8"?>
-<p:sld xmlns:a="http://schemas.openxmlformats.org/drawingml/2006/main" xmlns:r="http://schemas.openxmlformats.org/officeDocument/2006/relationships" xmlns:p="http://schemas.openxmlformats.org/presentationml/2006/main">
-  <p:cSld>
-    <p:spTree>
-      <p:nvGrpSpPr>
-        <p:cNvPr id="1" name=""/>
-        <p:cNvGrpSpPr/>
-        <p:nvPr/>
-      </p:nvGrpSpPr>
-      <p:grpSpPr>
-        <a:xfrm>
-          <a:off x="0" y="0"/>
-          <a:ext cx="0" cy="0"/>
-          <a:chOff x="0" y="0"/>
-          <a:chExt cx="0" cy="0"/>
-        </a:xfrm>
-      </p:grpSpPr>
-      <p:sp>
-        <p:nvSpPr>
-          <p:cNvPr id="2" name="Title 1"/>
-          <p:cNvSpPr>
-            <a:spLocks noGrp="1"/>
-          </p:cNvSpPr>
-          <p:nvPr>
-            <p:ph type="title"/>
-          </p:nvPr>
-        </p:nvSpPr>
-        <p:spPr/>
-        <p:txBody>
-          <a:bodyPr/>
-          <a:lstStyle/>
-          <a:p>
-            <a:r>
-              <a:rPr lang="en-US"/>
-              <a:t>A key NASA Motivation</a:t>
-            </a:r>
-          </a:p>
-        </p:txBody>
-      </p:sp>
-      <p:pic>
-        <p:nvPicPr>
-          <p:cNvPr id="4" name="Picture 3" descr="800px-Mars_Climate_Orbiter_-_mishap_diagram.png"/>
-          <p:cNvPicPr>
-            <a:picLocks noChangeAspect="1"/>
-          </p:cNvPicPr>
-          <p:nvPr/>
-        </p:nvPicPr>
-        <p:blipFill>
-          <a:blip r:embed="rId2">
-            <a:extLst>
-              <a:ext uri="{28A0092B-C50C-407E-A947-70E740481C1C}">
-                <a14:useLocalDpi xmlns:a14="http://schemas.microsoft.com/office/drawing/2010/main" val="0"/>
-              </a:ext>
-            </a:extLst>
-          </a:blip>
-          <a:stretch>
-            <a:fillRect/>
-          </a:stretch>
-        </p:blipFill>
-        <p:spPr>
-          <a:xfrm>
-            <a:off x="8093664" y="1294957"/>
-            <a:ext cx="3606127" cy="2497243"/>
-          </a:xfrm>
-          <a:prstGeom prst="rect">
-            <a:avLst/>
-          </a:prstGeom>
-        </p:spPr>
-      </p:pic>
-      <p:pic>
-        <p:nvPicPr>
-          <p:cNvPr id="6" name="Picture 5" descr="Mars_Climate_Orbiter_-_artist_depiction_-_climate-orbiter-browse.jpg"/>
-          <p:cNvPicPr>
-            <a:picLocks noChangeAspect="1"/>
-          </p:cNvPicPr>
-          <p:nvPr/>
-        </p:nvPicPr>
-        <p:blipFill>
-          <a:blip r:embed="rId3">
-            <a:extLst>
-              <a:ext uri="{28A0092B-C50C-407E-A947-70E740481C1C}">
-                <a14:useLocalDpi xmlns:a14="http://schemas.microsoft.com/office/drawing/2010/main" val="0"/>
-              </a:ext>
-            </a:extLst>
-          </a:blip>
-          <a:stretch>
-            <a:fillRect/>
-          </a:stretch>
-        </p:blipFill>
-        <p:spPr>
-          <a:xfrm>
-            <a:off x="8093664" y="3956153"/>
-            <a:ext cx="3444832" cy="2600848"/>
-          </a:xfrm>
-          <a:prstGeom prst="rect">
-            <a:avLst/>
-          </a:prstGeom>
-        </p:spPr>
-      </p:pic>
-      <p:sp>
-        <p:nvSpPr>
-          <p:cNvPr id="8" name="TextBox 7"/>
-          <p:cNvSpPr txBox="1"/>
-          <p:nvPr/>
-        </p:nvSpPr>
-        <p:spPr>
-          <a:xfrm>
-            <a:off x="815545" y="2279820"/>
-            <a:ext cx="6251763" cy="3939540"/>
-          </a:xfrm>
-          <a:prstGeom prst="rect">
-            <a:avLst/>
-          </a:prstGeom>
-          <a:noFill/>
-        </p:spPr>
-        <p:txBody>
-          <a:bodyPr wrap="square" rtlCol="0">
-            <a:spAutoFit/>
-          </a:bodyPr>
-          <a:lstStyle/>
-          <a:p>
-            <a:r>
-              <a:rPr lang="en-US" sz="3200" b="1" dirty="0"/>
-              <a:t>NASA's metric confusion caused Mars orbiter loss</a:t>
-            </a:r>
-          </a:p>
-          <a:p>
-            <a:endParaRPr lang="en-US" sz="2800" i="1" dirty="0"/>
-          </a:p>
-          <a:p>
-            <a:r>
-              <a:rPr lang="en-US" sz="2800" i="1" dirty="0"/>
-              <a:t>Web posted at: 1:46 p.m. EDT (1746 GMT)</a:t>
-            </a:r>
-            <a:endParaRPr lang="en-US" sz="2800" dirty="0"/>
-          </a:p>
-          <a:p>
-            <a:r>
-              <a:rPr lang="en-US" sz="2800" dirty="0"/>
-              <a:t>(CNN) -- NASA lost a $125 million Mars orbiter because one engineering team used metric units while another used English units </a:t>
-            </a:r>
-          </a:p>
-          <a:p>
-            <a:endParaRPr lang="en-US" dirty="0"/>
-          </a:p>
-        </p:txBody>
-      </p:sp>
-      <p:pic>
-        <p:nvPicPr>
-          <p:cNvPr id="3" name="Picture 6" descr="4Color">
-            <a:extLst>
-              <a:ext uri="{FF2B5EF4-FFF2-40B4-BE49-F238E27FC236}">
-                <a16:creationId xmlns:a16="http://schemas.microsoft.com/office/drawing/2014/main" id="{CD4BF869-7AF8-6FDD-6787-14B34DC585DB}"/>
-              </a:ext>
-            </a:extLst>
-          </p:cNvPr>
-          <p:cNvPicPr>
-            <a:picLocks noChangeAspect="1" noChangeArrowheads="1"/>
-          </p:cNvPicPr>
-          <p:nvPr/>
-        </p:nvPicPr>
-        <p:blipFill>
-          <a:blip r:embed="rId4" cstate="print"/>
-          <a:srcRect/>
-          <a:stretch>
-            <a:fillRect/>
-          </a:stretch>
-        </p:blipFill>
-        <p:spPr bwMode="auto">
-          <a:xfrm>
-            <a:off x="190089" y="998296"/>
-            <a:ext cx="1166448" cy="967037"/>
-          </a:xfrm>
-          <a:prstGeom prst="rect">
-            <a:avLst/>
-          </a:prstGeom>
-          <a:noFill/>
-          <a:ln w="9525">
-            <a:noFill/>
-            <a:miter lim="800000"/>
-            <a:headEnd/>
-            <a:tailEnd/>
-          </a:ln>
-        </p:spPr>
-      </p:pic>
-      <p:pic>
-        <p:nvPicPr>
-          <p:cNvPr id="5" name="Picture 4" descr="Mars_Climate_Orbiter_-_artist_depiction_-_climate-orbiter-browse.jpg">
-            <a:extLst>
-              <a:ext uri="{FF2B5EF4-FFF2-40B4-BE49-F238E27FC236}">
-                <a16:creationId xmlns:a16="http://schemas.microsoft.com/office/drawing/2014/main" id="{B02A7E7D-6097-3DD9-016B-792BD864D01C}"/>
-              </a:ext>
-            </a:extLst>
-          </p:cNvPr>
-          <p:cNvPicPr>
-            <a:picLocks noChangeAspect="1"/>
-          </p:cNvPicPr>
-          <p:nvPr/>
-        </p:nvPicPr>
-        <p:blipFill>
-          <a:blip r:embed="rId3">
-            <a:extLst>
-              <a:ext uri="{28A0092B-C50C-407E-A947-70E740481C1C}">
-                <a14:useLocalDpi xmlns:a14="http://schemas.microsoft.com/office/drawing/2010/main" val="0"/>
-              </a:ext>
-            </a:extLst>
-          </a:blip>
-          <a:stretch>
-            <a:fillRect/>
-          </a:stretch>
-        </p:blipFill>
-        <p:spPr>
-          <a:xfrm>
-            <a:off x="8093664" y="3906539"/>
-            <a:ext cx="3606127" cy="2722626"/>
-          </a:xfrm>
-          <a:prstGeom prst="rect">
-            <a:avLst/>
-          </a:prstGeom>
-        </p:spPr>
-      </p:pic>
-    </p:spTree>
-    <p:extLst>
-      <p:ext uri="{BB962C8B-B14F-4D97-AF65-F5344CB8AC3E}">
-        <p14:creationId xmlns:p14="http://schemas.microsoft.com/office/powerpoint/2010/main" val="1610600083"/>
-      </p:ext>
-    </p:extLst>
-  </p:cSld>
-  <p:clrMapOvr>
-    <a:masterClrMapping/>
-  </p:clrMapOvr>
-</p:sld>
-</file>
-
-<file path=ppt/slides/slide20.xml><?xml version="1.0" encoding="utf-8"?>
+<file path=ppt/slides/slide19.xml><?xml version="1.0" encoding="utf-8"?>
 <p:sld xmlns:a="http://schemas.openxmlformats.org/drawingml/2006/main" xmlns:r="http://schemas.openxmlformats.org/officeDocument/2006/relationships" xmlns:p="http://schemas.openxmlformats.org/presentationml/2006/main">
   <p:cSld>
     <p:spTree>
@@ -7976,34 +7381,6 @@
       </p:sp>
       <p:sp>
         <p:nvSpPr>
-          <p:cNvPr id="5" name="Date Placeholder 4">
-            <a:extLst>
-              <a:ext uri="{FF2B5EF4-FFF2-40B4-BE49-F238E27FC236}">
-                <a16:creationId xmlns:a16="http://schemas.microsoft.com/office/drawing/2014/main" id="{E41F41EE-57BA-1660-F223-49A006630914}"/>
-              </a:ext>
-            </a:extLst>
-          </p:cNvPr>
-          <p:cNvSpPr>
-            <a:spLocks noGrp="1"/>
-          </p:cNvSpPr>
-          <p:nvPr>
-            <p:ph type="dt" sz="half" idx="10"/>
-          </p:nvPr>
-        </p:nvSpPr>
-        <p:spPr/>
-        <p:txBody>
-          <a:bodyPr/>
-          <a:lstStyle/>
-          <a:p>
-            <a:r>
-              <a:rPr lang="en-US"/>
-              <a:t>20th May, 2025</a:t>
-            </a:r>
-          </a:p>
-        </p:txBody>
-      </p:sp>
-      <p:sp>
-        <p:nvSpPr>
           <p:cNvPr id="6" name="Footer Placeholder 5">
             <a:extLst>
               <a:ext uri="{FF2B5EF4-FFF2-40B4-BE49-F238E27FC236}">
@@ -8053,7 +7430,7 @@
           <a:p>
             <a:fld id="{E8B94566-E730-314F-8C05-3849AEE21A50}" type="slidenum">
               <a:rPr lang="en-US" smtClean="0"/>
-              <a:t>20</a:t>
+              <a:t>19</a:t>
             </a:fld>
             <a:endParaRPr lang="en-US"/>
           </a:p>
@@ -8072,7 +7449,7 @@
 </p:sld>
 </file>
 
-<file path=ppt/slides/slide21.xml><?xml version="1.0" encoding="utf-8"?>
+<file path=ppt/slides/slide2.xml><?xml version="1.0" encoding="utf-8"?>
 <p:sld xmlns:a="http://schemas.openxmlformats.org/drawingml/2006/main" xmlns:r="http://schemas.openxmlformats.org/officeDocument/2006/relationships" xmlns:p="http://schemas.openxmlformats.org/presentationml/2006/main">
   <p:cSld>
     <p:spTree>
@@ -8091,6 +7468,240 @@
       </p:grpSpPr>
       <p:sp>
         <p:nvSpPr>
+          <p:cNvPr id="2" name="Title 1"/>
+          <p:cNvSpPr>
+            <a:spLocks noGrp="1"/>
+          </p:cNvSpPr>
+          <p:nvPr>
+            <p:ph type="title"/>
+          </p:nvPr>
+        </p:nvSpPr>
+        <p:spPr/>
+        <p:txBody>
+          <a:bodyPr/>
+          <a:lstStyle/>
+          <a:p>
+            <a:r>
+              <a:rPr lang="en-US"/>
+              <a:t>A key NASA Motivation</a:t>
+            </a:r>
+          </a:p>
+        </p:txBody>
+      </p:sp>
+      <p:pic>
+        <p:nvPicPr>
+          <p:cNvPr id="4" name="Picture 3" descr="800px-Mars_Climate_Orbiter_-_mishap_diagram.png"/>
+          <p:cNvPicPr>
+            <a:picLocks noChangeAspect="1"/>
+          </p:cNvPicPr>
+          <p:nvPr/>
+        </p:nvPicPr>
+        <p:blipFill>
+          <a:blip r:embed="rId2">
+            <a:extLst>
+              <a:ext uri="{28A0092B-C50C-407E-A947-70E740481C1C}">
+                <a14:useLocalDpi xmlns:a14="http://schemas.microsoft.com/office/drawing/2010/main" val="0"/>
+              </a:ext>
+            </a:extLst>
+          </a:blip>
+          <a:stretch>
+            <a:fillRect/>
+          </a:stretch>
+        </p:blipFill>
+        <p:spPr>
+          <a:xfrm>
+            <a:off x="8093664" y="1294957"/>
+            <a:ext cx="3606127" cy="2497243"/>
+          </a:xfrm>
+          <a:prstGeom prst="rect">
+            <a:avLst/>
+          </a:prstGeom>
+        </p:spPr>
+      </p:pic>
+      <p:pic>
+        <p:nvPicPr>
+          <p:cNvPr id="6" name="Picture 5" descr="Mars_Climate_Orbiter_-_artist_depiction_-_climate-orbiter-browse.jpg"/>
+          <p:cNvPicPr>
+            <a:picLocks noChangeAspect="1"/>
+          </p:cNvPicPr>
+          <p:nvPr/>
+        </p:nvPicPr>
+        <p:blipFill>
+          <a:blip r:embed="rId3">
+            <a:extLst>
+              <a:ext uri="{28A0092B-C50C-407E-A947-70E740481C1C}">
+                <a14:useLocalDpi xmlns:a14="http://schemas.microsoft.com/office/drawing/2010/main" val="0"/>
+              </a:ext>
+            </a:extLst>
+          </a:blip>
+          <a:stretch>
+            <a:fillRect/>
+          </a:stretch>
+        </p:blipFill>
+        <p:spPr>
+          <a:xfrm>
+            <a:off x="8093664" y="3956153"/>
+            <a:ext cx="3444832" cy="2600848"/>
+          </a:xfrm>
+          <a:prstGeom prst="rect">
+            <a:avLst/>
+          </a:prstGeom>
+        </p:spPr>
+      </p:pic>
+      <p:sp>
+        <p:nvSpPr>
+          <p:cNvPr id="8" name="TextBox 7"/>
+          <p:cNvSpPr txBox="1"/>
+          <p:nvPr/>
+        </p:nvSpPr>
+        <p:spPr>
+          <a:xfrm>
+            <a:off x="815545" y="2279820"/>
+            <a:ext cx="6251763" cy="3939540"/>
+          </a:xfrm>
+          <a:prstGeom prst="rect">
+            <a:avLst/>
+          </a:prstGeom>
+          <a:noFill/>
+        </p:spPr>
+        <p:txBody>
+          <a:bodyPr wrap="square" rtlCol="0">
+            <a:spAutoFit/>
+          </a:bodyPr>
+          <a:lstStyle/>
+          <a:p>
+            <a:r>
+              <a:rPr lang="en-US" sz="3200" b="1" dirty="0"/>
+              <a:t>NASA's metric confusion caused Mars orbiter loss</a:t>
+            </a:r>
+          </a:p>
+          <a:p>
+            <a:endParaRPr lang="en-US" sz="2800" i="1" dirty="0"/>
+          </a:p>
+          <a:p>
+            <a:r>
+              <a:rPr lang="en-US" sz="2800" i="1" dirty="0"/>
+              <a:t>Web posted at: 1:46 p.m. EDT (1746 GMT)</a:t>
+            </a:r>
+            <a:endParaRPr lang="en-US" sz="2800" dirty="0"/>
+          </a:p>
+          <a:p>
+            <a:r>
+              <a:rPr lang="en-US" sz="2800" dirty="0"/>
+              <a:t>(CNN) -- NASA lost a $125 million Mars orbiter because one engineering team used metric units while another used English units </a:t>
+            </a:r>
+          </a:p>
+          <a:p>
+            <a:endParaRPr lang="en-US" dirty="0"/>
+          </a:p>
+        </p:txBody>
+      </p:sp>
+      <p:pic>
+        <p:nvPicPr>
+          <p:cNvPr id="3" name="Picture 6" descr="4Color">
+            <a:extLst>
+              <a:ext uri="{FF2B5EF4-FFF2-40B4-BE49-F238E27FC236}">
+                <a16:creationId xmlns:a16="http://schemas.microsoft.com/office/drawing/2014/main" id="{CD4BF869-7AF8-6FDD-6787-14B34DC585DB}"/>
+              </a:ext>
+            </a:extLst>
+          </p:cNvPr>
+          <p:cNvPicPr>
+            <a:picLocks noChangeAspect="1" noChangeArrowheads="1"/>
+          </p:cNvPicPr>
+          <p:nvPr/>
+        </p:nvPicPr>
+        <p:blipFill>
+          <a:blip r:embed="rId4" cstate="print"/>
+          <a:srcRect/>
+          <a:stretch>
+            <a:fillRect/>
+          </a:stretch>
+        </p:blipFill>
+        <p:spPr bwMode="auto">
+          <a:xfrm>
+            <a:off x="190089" y="998296"/>
+            <a:ext cx="1166448" cy="967037"/>
+          </a:xfrm>
+          <a:prstGeom prst="rect">
+            <a:avLst/>
+          </a:prstGeom>
+          <a:noFill/>
+          <a:ln w="9525">
+            <a:noFill/>
+            <a:miter lim="800000"/>
+            <a:headEnd/>
+            <a:tailEnd/>
+          </a:ln>
+        </p:spPr>
+      </p:pic>
+      <p:pic>
+        <p:nvPicPr>
+          <p:cNvPr id="5" name="Picture 4" descr="Mars_Climate_Orbiter_-_artist_depiction_-_climate-orbiter-browse.jpg">
+            <a:extLst>
+              <a:ext uri="{FF2B5EF4-FFF2-40B4-BE49-F238E27FC236}">
+                <a16:creationId xmlns:a16="http://schemas.microsoft.com/office/drawing/2014/main" id="{B02A7E7D-6097-3DD9-016B-792BD864D01C}"/>
+              </a:ext>
+            </a:extLst>
+          </p:cNvPr>
+          <p:cNvPicPr>
+            <a:picLocks noChangeAspect="1"/>
+          </p:cNvPicPr>
+          <p:nvPr/>
+        </p:nvPicPr>
+        <p:blipFill>
+          <a:blip r:embed="rId3">
+            <a:extLst>
+              <a:ext uri="{28A0092B-C50C-407E-A947-70E740481C1C}">
+                <a14:useLocalDpi xmlns:a14="http://schemas.microsoft.com/office/drawing/2010/main" val="0"/>
+              </a:ext>
+            </a:extLst>
+          </a:blip>
+          <a:stretch>
+            <a:fillRect/>
+          </a:stretch>
+        </p:blipFill>
+        <p:spPr>
+          <a:xfrm>
+            <a:off x="8093664" y="3906539"/>
+            <a:ext cx="3606127" cy="2722626"/>
+          </a:xfrm>
+          <a:prstGeom prst="rect">
+            <a:avLst/>
+          </a:prstGeom>
+        </p:spPr>
+      </p:pic>
+    </p:spTree>
+    <p:extLst>
+      <p:ext uri="{BB962C8B-B14F-4D97-AF65-F5344CB8AC3E}">
+        <p14:creationId xmlns:p14="http://schemas.microsoft.com/office/powerpoint/2010/main" val="1610600083"/>
+      </p:ext>
+    </p:extLst>
+  </p:cSld>
+  <p:clrMapOvr>
+    <a:masterClrMapping/>
+  </p:clrMapOvr>
+</p:sld>
+</file>
+
+<file path=ppt/slides/slide20.xml><?xml version="1.0" encoding="utf-8"?>
+<p:sld xmlns:a="http://schemas.openxmlformats.org/drawingml/2006/main" xmlns:r="http://schemas.openxmlformats.org/officeDocument/2006/relationships" xmlns:p="http://schemas.openxmlformats.org/presentationml/2006/main">
+  <p:cSld>
+    <p:spTree>
+      <p:nvGrpSpPr>
+        <p:cNvPr id="1" name=""/>
+        <p:cNvGrpSpPr/>
+        <p:nvPr/>
+      </p:nvGrpSpPr>
+      <p:grpSpPr>
+        <a:xfrm>
+          <a:off x="0" y="0"/>
+          <a:ext cx="0" cy="0"/>
+          <a:chOff x="0" y="0"/>
+          <a:chExt cx="0" cy="0"/>
+        </a:xfrm>
+      </p:grpSpPr>
+      <p:sp>
+        <p:nvSpPr>
           <p:cNvPr id="2" name="Title 1">
             <a:extLst>
               <a:ext uri="{FF2B5EF4-FFF2-40B4-BE49-F238E27FC236}">
@@ -8213,34 +7824,6 @@
       </p:sp>
       <p:sp>
         <p:nvSpPr>
-          <p:cNvPr id="5" name="Date Placeholder 4">
-            <a:extLst>
-              <a:ext uri="{FF2B5EF4-FFF2-40B4-BE49-F238E27FC236}">
-                <a16:creationId xmlns:a16="http://schemas.microsoft.com/office/drawing/2014/main" id="{E0219ED5-31B6-24B5-E939-99E27F41CC13}"/>
-              </a:ext>
-            </a:extLst>
-          </p:cNvPr>
-          <p:cNvSpPr>
-            <a:spLocks noGrp="1"/>
-          </p:cNvSpPr>
-          <p:nvPr>
-            <p:ph type="dt" sz="half" idx="10"/>
-          </p:nvPr>
-        </p:nvSpPr>
-        <p:spPr/>
-        <p:txBody>
-          <a:bodyPr/>
-          <a:lstStyle/>
-          <a:p>
-            <a:r>
-              <a:rPr lang="en-US"/>
-              <a:t>20th May, 2025</a:t>
-            </a:r>
-          </a:p>
-        </p:txBody>
-      </p:sp>
-      <p:sp>
-        <p:nvSpPr>
           <p:cNvPr id="6" name="Footer Placeholder 5">
             <a:extLst>
               <a:ext uri="{FF2B5EF4-FFF2-40B4-BE49-F238E27FC236}">
@@ -8290,7 +7873,7 @@
           <a:p>
             <a:fld id="{E8B94566-E730-314F-8C05-3849AEE21A50}" type="slidenum">
               <a:rPr lang="en-US" smtClean="0"/>
-              <a:t>21</a:t>
+              <a:t>20</a:t>
             </a:fld>
             <a:endParaRPr lang="en-US"/>
           </a:p>
@@ -8608,7 +8191,7 @@
 </p:sld>
 </file>
 
-<file path=ppt/slides/slide22.xml><?xml version="1.0" encoding="utf-8"?>
+<file path=ppt/slides/slide21.xml><?xml version="1.0" encoding="utf-8"?>
 <p:sld xmlns:a="http://schemas.openxmlformats.org/drawingml/2006/main" xmlns:r="http://schemas.openxmlformats.org/officeDocument/2006/relationships" xmlns:p="http://schemas.openxmlformats.org/presentationml/2006/main">
   <p:cSld>
     <p:spTree>
@@ -8753,34 +8336,6 @@
       </p:sp>
       <p:sp>
         <p:nvSpPr>
-          <p:cNvPr id="4" name="Date Placeholder 3">
-            <a:extLst>
-              <a:ext uri="{FF2B5EF4-FFF2-40B4-BE49-F238E27FC236}">
-                <a16:creationId xmlns:a16="http://schemas.microsoft.com/office/drawing/2014/main" id="{EB03504C-866B-59F4-8B4C-F490C11B935A}"/>
-              </a:ext>
-            </a:extLst>
-          </p:cNvPr>
-          <p:cNvSpPr>
-            <a:spLocks noGrp="1"/>
-          </p:cNvSpPr>
-          <p:nvPr>
-            <p:ph type="dt" sz="half" idx="10"/>
-          </p:nvPr>
-        </p:nvSpPr>
-        <p:spPr/>
-        <p:txBody>
-          <a:bodyPr/>
-          <a:lstStyle/>
-          <a:p>
-            <a:r>
-              <a:rPr lang="en-US"/>
-              <a:t>20th May, 2025</a:t>
-            </a:r>
-          </a:p>
-        </p:txBody>
-      </p:sp>
-      <p:sp>
-        <p:nvSpPr>
           <p:cNvPr id="5" name="Footer Placeholder 4">
             <a:extLst>
               <a:ext uri="{FF2B5EF4-FFF2-40B4-BE49-F238E27FC236}">
@@ -8830,7 +8385,7 @@
           <a:p>
             <a:fld id="{E8B94566-E730-314F-8C05-3849AEE21A50}" type="slidenum">
               <a:rPr lang="en-US" smtClean="0"/>
-              <a:t>22</a:t>
+              <a:t>21</a:t>
             </a:fld>
             <a:endParaRPr lang="en-US"/>
           </a:p>
@@ -8849,7 +8404,7 @@
 </p:sld>
 </file>
 
-<file path=ppt/slides/slide23.xml><?xml version="1.0" encoding="utf-8"?>
+<file path=ppt/slides/slide22.xml><?xml version="1.0" encoding="utf-8"?>
 <p:sld xmlns:a="http://schemas.openxmlformats.org/drawingml/2006/main" xmlns:r="http://schemas.openxmlformats.org/officeDocument/2006/relationships" xmlns:p="http://schemas.openxmlformats.org/presentationml/2006/main">
   <p:cSld>
     <p:spTree>
@@ -9058,34 +8613,6 @@
       </p:sp>
       <p:sp>
         <p:nvSpPr>
-          <p:cNvPr id="4" name="Date Placeholder 3">
-            <a:extLst>
-              <a:ext uri="{FF2B5EF4-FFF2-40B4-BE49-F238E27FC236}">
-                <a16:creationId xmlns:a16="http://schemas.microsoft.com/office/drawing/2014/main" id="{DA105FA3-280E-E180-4FFD-F9CA6252B5DA}"/>
-              </a:ext>
-            </a:extLst>
-          </p:cNvPr>
-          <p:cNvSpPr>
-            <a:spLocks noGrp="1"/>
-          </p:cNvSpPr>
-          <p:nvPr>
-            <p:ph type="dt" sz="half" idx="10"/>
-          </p:nvPr>
-        </p:nvSpPr>
-        <p:spPr/>
-        <p:txBody>
-          <a:bodyPr/>
-          <a:lstStyle/>
-          <a:p>
-            <a:r>
-              <a:rPr lang="en-US"/>
-              <a:t>20th May, 2025</a:t>
-            </a:r>
-          </a:p>
-        </p:txBody>
-      </p:sp>
-      <p:sp>
-        <p:nvSpPr>
           <p:cNvPr id="5" name="Footer Placeholder 4">
             <a:extLst>
               <a:ext uri="{FF2B5EF4-FFF2-40B4-BE49-F238E27FC236}">
@@ -9118,6 +8645,213 @@
             <a:extLst>
               <a:ext uri="{FF2B5EF4-FFF2-40B4-BE49-F238E27FC236}">
                 <a16:creationId xmlns:a16="http://schemas.microsoft.com/office/drawing/2014/main" id="{9D1CFEB6-8240-17F7-E782-2FEE7A814F76}"/>
+              </a:ext>
+            </a:extLst>
+          </p:cNvPr>
+          <p:cNvSpPr>
+            <a:spLocks noGrp="1"/>
+          </p:cNvSpPr>
+          <p:nvPr>
+            <p:ph type="sldNum" sz="quarter" idx="12"/>
+          </p:nvPr>
+        </p:nvSpPr>
+        <p:spPr/>
+        <p:txBody>
+          <a:bodyPr/>
+          <a:lstStyle/>
+          <a:p>
+            <a:fld id="{E8B94566-E730-314F-8C05-3849AEE21A50}" type="slidenum">
+              <a:rPr lang="en-US" smtClean="0"/>
+              <a:t>22</a:t>
+            </a:fld>
+            <a:endParaRPr lang="en-US"/>
+          </a:p>
+        </p:txBody>
+      </p:sp>
+    </p:spTree>
+    <p:extLst>
+      <p:ext uri="{BB962C8B-B14F-4D97-AF65-F5344CB8AC3E}">
+        <p14:creationId xmlns:p14="http://schemas.microsoft.com/office/powerpoint/2010/main" val="148955570"/>
+      </p:ext>
+    </p:extLst>
+  </p:cSld>
+  <p:clrMapOvr>
+    <a:masterClrMapping/>
+  </p:clrMapOvr>
+</p:sld>
+</file>
+
+<file path=ppt/slides/slide23.xml><?xml version="1.0" encoding="utf-8"?>
+<p:sld xmlns:a="http://schemas.openxmlformats.org/drawingml/2006/main" xmlns:r="http://schemas.openxmlformats.org/officeDocument/2006/relationships" xmlns:p="http://schemas.openxmlformats.org/presentationml/2006/main">
+  <p:cSld>
+    <p:spTree>
+      <p:nvGrpSpPr>
+        <p:cNvPr id="1" name=""/>
+        <p:cNvGrpSpPr/>
+        <p:nvPr/>
+      </p:nvGrpSpPr>
+      <p:grpSpPr>
+        <a:xfrm>
+          <a:off x="0" y="0"/>
+          <a:ext cx="0" cy="0"/>
+          <a:chOff x="0" y="0"/>
+          <a:chExt cx="0" cy="0"/>
+        </a:xfrm>
+      </p:grpSpPr>
+      <p:sp>
+        <p:nvSpPr>
+          <p:cNvPr id="2" name="Title 1">
+            <a:extLst>
+              <a:ext uri="{FF2B5EF4-FFF2-40B4-BE49-F238E27FC236}">
+                <a16:creationId xmlns:a16="http://schemas.microsoft.com/office/drawing/2014/main" id="{CD177A3A-670D-4CB3-8E64-3472AE9CF97D}"/>
+              </a:ext>
+            </a:extLst>
+          </p:cNvPr>
+          <p:cNvSpPr>
+            <a:spLocks noGrp="1"/>
+          </p:cNvSpPr>
+          <p:nvPr>
+            <p:ph type="title"/>
+          </p:nvPr>
+        </p:nvSpPr>
+        <p:spPr>
+          <a:solidFill>
+            <a:srgbClr val="003746"/>
+          </a:solidFill>
+          <a:ln w="19050">
+            <a:solidFill>
+              <a:srgbClr val="00FF78"/>
+            </a:solidFill>
+          </a:ln>
+        </p:spPr>
+        <p:txBody>
+          <a:bodyPr>
+            <a:normAutofit/>
+          </a:bodyPr>
+          <a:lstStyle/>
+          <a:p>
+            <a:r>
+              <a:rPr lang="en-US">
+                <a:solidFill>
+                  <a:srgbClr val="00FF78"/>
+                </a:solidFill>
+              </a:rPr>
+              <a:t>Current Developments</a:t>
+            </a:r>
+          </a:p>
+        </p:txBody>
+      </p:sp>
+      <p:sp>
+        <p:nvSpPr>
+          <p:cNvPr id="3" name="Content Placeholder 2">
+            <a:extLst>
+              <a:ext uri="{FF2B5EF4-FFF2-40B4-BE49-F238E27FC236}">
+                <a16:creationId xmlns:a16="http://schemas.microsoft.com/office/drawing/2014/main" id="{E4A81DD8-173F-4108-BCE6-B941ED7737A8}"/>
+              </a:ext>
+            </a:extLst>
+          </p:cNvPr>
+          <p:cNvSpPr>
+            <a:spLocks noGrp="1"/>
+          </p:cNvSpPr>
+          <p:nvPr>
+            <p:ph idx="1"/>
+          </p:nvPr>
+        </p:nvSpPr>
+        <p:spPr/>
+        <p:txBody>
+          <a:bodyPr>
+            <a:normAutofit/>
+          </a:bodyPr>
+          <a:lstStyle/>
+          <a:p>
+            <a:r>
+              <a:rPr lang="en-US" b="1"/>
+              <a:t>Profiles</a:t>
+            </a:r>
+          </a:p>
+          <a:p>
+            <a:pPr lvl="1"/>
+            <a:r>
+              <a:rPr lang="en-US"/>
+              <a:t>Community-Driven subsets of units and quantity kinds appropriate to domains and disciplines</a:t>
+            </a:r>
+          </a:p>
+          <a:p>
+            <a:r>
+              <a:rPr lang="en-US" b="1"/>
+              <a:t>Compact Unique Identifiers</a:t>
+            </a:r>
+          </a:p>
+          <a:p>
+            <a:pPr lvl="1"/>
+            <a:r>
+              <a:rPr lang="en-US"/>
+              <a:t>for telemetry, bandwidth-limited or memory-limited devices</a:t>
+            </a:r>
+          </a:p>
+          <a:p>
+            <a:r>
+              <a:rPr lang="en-US" b="1"/>
+              <a:t>Build Automation</a:t>
+            </a:r>
+          </a:p>
+          <a:p>
+            <a:pPr lvl="1"/>
+            <a:r>
+              <a:rPr lang="en-US"/>
+              <a:t>Validation</a:t>
+            </a:r>
+          </a:p>
+          <a:p>
+            <a:pPr lvl="1"/>
+            <a:r>
+              <a:rPr lang="en-US"/>
+              <a:t>Web page publication</a:t>
+            </a:r>
+          </a:p>
+          <a:p>
+            <a:pPr lvl="1"/>
+            <a:r>
+              <a:rPr lang="en-US"/>
+              <a:t>Release generation</a:t>
+            </a:r>
+          </a:p>
+        </p:txBody>
+      </p:sp>
+      <p:sp>
+        <p:nvSpPr>
+          <p:cNvPr id="5" name="Footer Placeholder 4">
+            <a:extLst>
+              <a:ext uri="{FF2B5EF4-FFF2-40B4-BE49-F238E27FC236}">
+                <a16:creationId xmlns:a16="http://schemas.microsoft.com/office/drawing/2014/main" id="{534DECD1-6035-D99C-692A-502BC48C672D}"/>
+              </a:ext>
+            </a:extLst>
+          </p:cNvPr>
+          <p:cNvSpPr>
+            <a:spLocks noGrp="1"/>
+          </p:cNvSpPr>
+          <p:nvPr>
+            <p:ph type="ftr" sz="quarter" idx="11"/>
+          </p:nvPr>
+        </p:nvSpPr>
+        <p:spPr/>
+        <p:txBody>
+          <a:bodyPr/>
+          <a:lstStyle/>
+          <a:p>
+            <a:r>
+              <a:rPr lang="en-US"/>
+              <a:t>QUDT Introduction</a:t>
+            </a:r>
+          </a:p>
+        </p:txBody>
+      </p:sp>
+      <p:sp>
+        <p:nvSpPr>
+          <p:cNvPr id="6" name="Slide Number Placeholder 5">
+            <a:extLst>
+              <a:ext uri="{FF2B5EF4-FFF2-40B4-BE49-F238E27FC236}">
+                <a16:creationId xmlns:a16="http://schemas.microsoft.com/office/drawing/2014/main" id="{D1C6771F-BDCE-5A12-CB91-15010599DDC1}"/>
               </a:ext>
             </a:extLst>
           </p:cNvPr>
@@ -9144,7 +8878,7 @@
     </p:spTree>
     <p:extLst>
       <p:ext uri="{BB962C8B-B14F-4D97-AF65-F5344CB8AC3E}">
-        <p14:creationId xmlns:p14="http://schemas.microsoft.com/office/powerpoint/2010/main" val="148955570"/>
+        <p14:creationId xmlns:p14="http://schemas.microsoft.com/office/powerpoint/2010/main" val="317556648"/>
       </p:ext>
     </p:extLst>
   </p:cSld>
@@ -9173,158 +8907,10 @@
       </p:grpSpPr>
       <p:sp>
         <p:nvSpPr>
-          <p:cNvPr id="2" name="Title 1">
-            <a:extLst>
-              <a:ext uri="{FF2B5EF4-FFF2-40B4-BE49-F238E27FC236}">
-                <a16:creationId xmlns:a16="http://schemas.microsoft.com/office/drawing/2014/main" id="{CD177A3A-670D-4CB3-8E64-3472AE9CF97D}"/>
-              </a:ext>
-            </a:extLst>
-          </p:cNvPr>
-          <p:cNvSpPr>
-            <a:spLocks noGrp="1"/>
-          </p:cNvSpPr>
-          <p:nvPr>
-            <p:ph type="title"/>
-          </p:nvPr>
-        </p:nvSpPr>
-        <p:spPr>
-          <a:solidFill>
-            <a:srgbClr val="003746"/>
-          </a:solidFill>
-          <a:ln w="19050">
-            <a:solidFill>
-              <a:srgbClr val="00FF78"/>
-            </a:solidFill>
-          </a:ln>
-        </p:spPr>
-        <p:txBody>
-          <a:bodyPr>
-            <a:normAutofit/>
-          </a:bodyPr>
-          <a:lstStyle/>
-          <a:p>
-            <a:r>
-              <a:rPr lang="en-US">
-                <a:solidFill>
-                  <a:srgbClr val="00FF78"/>
-                </a:solidFill>
-              </a:rPr>
-              <a:t>Current Developments</a:t>
-            </a:r>
-          </a:p>
-        </p:txBody>
-      </p:sp>
-      <p:sp>
-        <p:nvSpPr>
-          <p:cNvPr id="3" name="Content Placeholder 2">
-            <a:extLst>
-              <a:ext uri="{FF2B5EF4-FFF2-40B4-BE49-F238E27FC236}">
-                <a16:creationId xmlns:a16="http://schemas.microsoft.com/office/drawing/2014/main" id="{E4A81DD8-173F-4108-BCE6-B941ED7737A8}"/>
-              </a:ext>
-            </a:extLst>
-          </p:cNvPr>
-          <p:cNvSpPr>
-            <a:spLocks noGrp="1"/>
-          </p:cNvSpPr>
-          <p:nvPr>
-            <p:ph idx="1"/>
-          </p:nvPr>
-        </p:nvSpPr>
-        <p:spPr/>
-        <p:txBody>
-          <a:bodyPr>
-            <a:normAutofit/>
-          </a:bodyPr>
-          <a:lstStyle/>
-          <a:p>
-            <a:r>
-              <a:rPr lang="en-US" b="1"/>
-              <a:t>Profiles</a:t>
-            </a:r>
-          </a:p>
-          <a:p>
-            <a:pPr lvl="1"/>
-            <a:r>
-              <a:rPr lang="en-US"/>
-              <a:t>Community-Driven subsets of units and quantity kinds appropriate to domains and disciplines</a:t>
-            </a:r>
-          </a:p>
-          <a:p>
-            <a:r>
-              <a:rPr lang="en-US" b="1"/>
-              <a:t>Compact Unique Identifiers</a:t>
-            </a:r>
-          </a:p>
-          <a:p>
-            <a:pPr lvl="1"/>
-            <a:r>
-              <a:rPr lang="en-US"/>
-              <a:t>for telemetry, bandwidth-limited or memory-limited devices</a:t>
-            </a:r>
-          </a:p>
-          <a:p>
-            <a:r>
-              <a:rPr lang="en-US" b="1"/>
-              <a:t>Build Automation</a:t>
-            </a:r>
-          </a:p>
-          <a:p>
-            <a:pPr lvl="1"/>
-            <a:r>
-              <a:rPr lang="en-US"/>
-              <a:t>Validation</a:t>
-            </a:r>
-          </a:p>
-          <a:p>
-            <a:pPr lvl="1"/>
-            <a:r>
-              <a:rPr lang="en-US"/>
-              <a:t>Web page publication</a:t>
-            </a:r>
-          </a:p>
-          <a:p>
-            <a:pPr lvl="1"/>
-            <a:r>
-              <a:rPr lang="en-US"/>
-              <a:t>Release generation</a:t>
-            </a:r>
-          </a:p>
-        </p:txBody>
-      </p:sp>
-      <p:sp>
-        <p:nvSpPr>
-          <p:cNvPr id="4" name="Date Placeholder 3">
-            <a:extLst>
-              <a:ext uri="{FF2B5EF4-FFF2-40B4-BE49-F238E27FC236}">
-                <a16:creationId xmlns:a16="http://schemas.microsoft.com/office/drawing/2014/main" id="{1E74770D-7C04-618C-BE05-6A7267563643}"/>
-              </a:ext>
-            </a:extLst>
-          </p:cNvPr>
-          <p:cNvSpPr>
-            <a:spLocks noGrp="1"/>
-          </p:cNvSpPr>
-          <p:nvPr>
-            <p:ph type="dt" sz="half" idx="10"/>
-          </p:nvPr>
-        </p:nvSpPr>
-        <p:spPr/>
-        <p:txBody>
-          <a:bodyPr/>
-          <a:lstStyle/>
-          <a:p>
-            <a:r>
-              <a:rPr lang="en-US"/>
-              <a:t>20th May, 2025</a:t>
-            </a:r>
-          </a:p>
-        </p:txBody>
-      </p:sp>
-      <p:sp>
-        <p:nvSpPr>
           <p:cNvPr id="5" name="Footer Placeholder 4">
             <a:extLst>
               <a:ext uri="{FF2B5EF4-FFF2-40B4-BE49-F238E27FC236}">
-                <a16:creationId xmlns:a16="http://schemas.microsoft.com/office/drawing/2014/main" id="{534DECD1-6035-D99C-692A-502BC48C672D}"/>
+                <a16:creationId xmlns:a16="http://schemas.microsoft.com/office/drawing/2014/main" id="{5B7FA5A8-14B9-FC9C-624B-DFEFE4A0B7B8}"/>
               </a:ext>
             </a:extLst>
           </p:cNvPr>
@@ -9352,7 +8938,7 @@
           <p:cNvPr id="6" name="Slide Number Placeholder 5">
             <a:extLst>
               <a:ext uri="{FF2B5EF4-FFF2-40B4-BE49-F238E27FC236}">
-                <a16:creationId xmlns:a16="http://schemas.microsoft.com/office/drawing/2014/main" id="{D1C6771F-BDCE-5A12-CB91-15010599DDC1}"/>
+                <a16:creationId xmlns:a16="http://schemas.microsoft.com/office/drawing/2014/main" id="{0176D55D-4642-EB0C-3882-71E210E41F51}"/>
               </a:ext>
             </a:extLst>
           </p:cNvPr>
@@ -9376,10 +8962,111 @@
           </a:p>
         </p:txBody>
       </p:sp>
+      <p:pic>
+        <p:nvPicPr>
+          <p:cNvPr id="9" name="Picture 8" descr="A screenshot of a graph&#10;&#10;AI-generated content may be incorrect.">
+            <a:extLst>
+              <a:ext uri="{FF2B5EF4-FFF2-40B4-BE49-F238E27FC236}">
+                <a16:creationId xmlns:a16="http://schemas.microsoft.com/office/drawing/2014/main" id="{765F8533-3A40-F4E8-C876-B7DD309FB167}"/>
+              </a:ext>
+            </a:extLst>
+          </p:cNvPr>
+          <p:cNvPicPr>
+            <a:picLocks noChangeAspect="1"/>
+          </p:cNvPicPr>
+          <p:nvPr/>
+        </p:nvPicPr>
+        <p:blipFill>
+          <a:blip r:embed="rId2"/>
+          <a:stretch>
+            <a:fillRect/>
+          </a:stretch>
+        </p:blipFill>
+        <p:spPr>
+          <a:xfrm>
+            <a:off x="2311968" y="114189"/>
+            <a:ext cx="7758155" cy="6424723"/>
+          </a:xfrm>
+          <a:prstGeom prst="rect">
+            <a:avLst/>
+          </a:prstGeom>
+        </p:spPr>
+      </p:pic>
+      <p:pic>
+        <p:nvPicPr>
+          <p:cNvPr id="10" name="Picture 6" descr="4Color">
+            <a:extLst>
+              <a:ext uri="{FF2B5EF4-FFF2-40B4-BE49-F238E27FC236}">
+                <a16:creationId xmlns:a16="http://schemas.microsoft.com/office/drawing/2014/main" id="{A1C96B09-BEE0-D49F-03ED-3995833BA752}"/>
+              </a:ext>
+            </a:extLst>
+          </p:cNvPr>
+          <p:cNvPicPr>
+            <a:picLocks noChangeAspect="1" noChangeArrowheads="1"/>
+          </p:cNvPicPr>
+          <p:nvPr/>
+        </p:nvPicPr>
+        <p:blipFill>
+          <a:blip r:embed="rId3" cstate="print"/>
+          <a:srcRect/>
+          <a:stretch>
+            <a:fillRect/>
+          </a:stretch>
+        </p:blipFill>
+        <p:spPr bwMode="auto">
+          <a:xfrm>
+            <a:off x="3030416" y="710955"/>
+            <a:ext cx="687388" cy="569875"/>
+          </a:xfrm>
+          <a:prstGeom prst="rect">
+            <a:avLst/>
+          </a:prstGeom>
+          <a:noFill/>
+          <a:ln w="9525">
+            <a:noFill/>
+            <a:miter lim="800000"/>
+            <a:headEnd/>
+            <a:tailEnd/>
+          </a:ln>
+        </p:spPr>
+      </p:pic>
+      <p:sp>
+        <p:nvSpPr>
+          <p:cNvPr id="2" name="Date Placeholder 2">
+            <a:extLst>
+              <a:ext uri="{FF2B5EF4-FFF2-40B4-BE49-F238E27FC236}">
+                <a16:creationId xmlns:a16="http://schemas.microsoft.com/office/drawing/2014/main" id="{EAFC4EC0-5246-39E3-ED17-2731B4129012}"/>
+              </a:ext>
+            </a:extLst>
+          </p:cNvPr>
+          <p:cNvSpPr>
+            <a:spLocks noGrp="1"/>
+          </p:cNvSpPr>
+          <p:nvPr>
+            <p:ph type="dt" sz="half" idx="10"/>
+          </p:nvPr>
+        </p:nvSpPr>
+        <p:spPr>
+          <a:xfrm>
+            <a:off x="187219" y="6356350"/>
+            <a:ext cx="2743200" cy="365125"/>
+          </a:xfrm>
+        </p:spPr>
+        <p:txBody>
+          <a:bodyPr/>
+          <a:lstStyle/>
+          <a:p>
+            <a:r>
+              <a:rPr lang="en-US" dirty="0"/>
+              <a:t>8 May 2025</a:t>
+            </a:r>
+          </a:p>
+        </p:txBody>
+      </p:sp>
     </p:spTree>
     <p:extLst>
       <p:ext uri="{BB962C8B-B14F-4D97-AF65-F5344CB8AC3E}">
-        <p14:creationId xmlns:p14="http://schemas.microsoft.com/office/powerpoint/2010/main" val="317556648"/>
+        <p14:creationId xmlns:p14="http://schemas.microsoft.com/office/powerpoint/2010/main" val="1263915834"/>
       </p:ext>
     </p:extLst>
   </p:cSld>
@@ -9785,10 +9472,38 @@
       </p:sp>
       <p:sp>
         <p:nvSpPr>
-          <p:cNvPr id="3" name="Date Placeholder 2">
-            <a:extLst>
-              <a:ext uri="{FF2B5EF4-FFF2-40B4-BE49-F238E27FC236}">
-                <a16:creationId xmlns:a16="http://schemas.microsoft.com/office/drawing/2014/main" id="{E0B8BE6A-E1E4-937B-6ECF-DB1531D3CB06}"/>
+          <p:cNvPr id="4" name="Footer Placeholder 3">
+            <a:extLst>
+              <a:ext uri="{FF2B5EF4-FFF2-40B4-BE49-F238E27FC236}">
+                <a16:creationId xmlns:a16="http://schemas.microsoft.com/office/drawing/2014/main" id="{652FEB7B-9062-6E37-39D3-3FDF9752A16B}"/>
+              </a:ext>
+            </a:extLst>
+          </p:cNvPr>
+          <p:cNvSpPr>
+            <a:spLocks noGrp="1"/>
+          </p:cNvSpPr>
+          <p:nvPr>
+            <p:ph type="ftr" sz="quarter" idx="11"/>
+          </p:nvPr>
+        </p:nvSpPr>
+        <p:spPr/>
+        <p:txBody>
+          <a:bodyPr/>
+          <a:lstStyle/>
+          <a:p>
+            <a:r>
+              <a:rPr lang="en-US"/>
+              <a:t>QUDT Introduction</a:t>
+            </a:r>
+          </a:p>
+        </p:txBody>
+      </p:sp>
+      <p:sp>
+        <p:nvSpPr>
+          <p:cNvPr id="5" name="Date Placeholder 2">
+            <a:extLst>
+              <a:ext uri="{FF2B5EF4-FFF2-40B4-BE49-F238E27FC236}">
+                <a16:creationId xmlns:a16="http://schemas.microsoft.com/office/drawing/2014/main" id="{23A4CC44-E25E-78BF-D995-BA360669ACCF}"/>
               </a:ext>
             </a:extLst>
           </p:cNvPr>
@@ -9799,42 +9514,19 @@
             <p:ph type="dt" sz="half" idx="10"/>
           </p:nvPr>
         </p:nvSpPr>
-        <p:spPr/>
+        <p:spPr>
+          <a:xfrm>
+            <a:off x="187219" y="6356350"/>
+            <a:ext cx="2743200" cy="365125"/>
+          </a:xfrm>
+        </p:spPr>
         <p:txBody>
           <a:bodyPr/>
           <a:lstStyle/>
           <a:p>
             <a:r>
-              <a:rPr lang="en-US"/>
-              <a:t>20th May, 2025</a:t>
-            </a:r>
-          </a:p>
-        </p:txBody>
-      </p:sp>
-      <p:sp>
-        <p:nvSpPr>
-          <p:cNvPr id="4" name="Footer Placeholder 3">
-            <a:extLst>
-              <a:ext uri="{FF2B5EF4-FFF2-40B4-BE49-F238E27FC236}">
-                <a16:creationId xmlns:a16="http://schemas.microsoft.com/office/drawing/2014/main" id="{652FEB7B-9062-6E37-39D3-3FDF9752A16B}"/>
-              </a:ext>
-            </a:extLst>
-          </p:cNvPr>
-          <p:cNvSpPr>
-            <a:spLocks noGrp="1"/>
-          </p:cNvSpPr>
-          <p:nvPr>
-            <p:ph type="ftr" sz="quarter" idx="11"/>
-          </p:nvPr>
-        </p:nvSpPr>
-        <p:spPr/>
-        <p:txBody>
-          <a:bodyPr/>
-          <a:lstStyle/>
-          <a:p>
-            <a:r>
-              <a:rPr lang="en-US"/>
-              <a:t>QUDT Introduction</a:t>
+              <a:rPr lang="en-US" dirty="0"/>
+              <a:t>8 May 2025</a:t>
             </a:r>
           </a:p>
         </p:txBody>
@@ -10998,34 +10690,6 @@
             <a:r>
               <a:rPr lang="en-US" sz="2600" dirty="0"/>
               <a:t>for Dimensional analysis</a:t>
-            </a:r>
-          </a:p>
-        </p:txBody>
-      </p:sp>
-      <p:sp>
-        <p:nvSpPr>
-          <p:cNvPr id="7" name="Date Placeholder 6">
-            <a:extLst>
-              <a:ext uri="{FF2B5EF4-FFF2-40B4-BE49-F238E27FC236}">
-                <a16:creationId xmlns:a16="http://schemas.microsoft.com/office/drawing/2014/main" id="{9E5CAEDA-3352-00C1-D698-C8A2DB34E35F}"/>
-              </a:ext>
-            </a:extLst>
-          </p:cNvPr>
-          <p:cNvSpPr>
-            <a:spLocks noGrp="1"/>
-          </p:cNvSpPr>
-          <p:nvPr>
-            <p:ph type="dt" sz="half" idx="10"/>
-          </p:nvPr>
-        </p:nvSpPr>
-        <p:spPr/>
-        <p:txBody>
-          <a:bodyPr/>
-          <a:lstStyle/>
-          <a:p>
-            <a:r>
-              <a:rPr lang="en-US"/>
-              <a:t>20th May, 2025</a:t>
             </a:r>
           </a:p>
         </p:txBody>
@@ -11186,6 +10850,39 @@
           </p:spPr>
         </p:pic>
       </p:grpSp>
+      <p:sp>
+        <p:nvSpPr>
+          <p:cNvPr id="5" name="Date Placeholder 2">
+            <a:extLst>
+              <a:ext uri="{FF2B5EF4-FFF2-40B4-BE49-F238E27FC236}">
+                <a16:creationId xmlns:a16="http://schemas.microsoft.com/office/drawing/2014/main" id="{86390C49-7733-D6DC-1B8B-8C958E10C4EE}"/>
+              </a:ext>
+            </a:extLst>
+          </p:cNvPr>
+          <p:cNvSpPr>
+            <a:spLocks noGrp="1"/>
+          </p:cNvSpPr>
+          <p:nvPr>
+            <p:ph type="dt" sz="half" idx="10"/>
+          </p:nvPr>
+        </p:nvSpPr>
+        <p:spPr>
+          <a:xfrm>
+            <a:off x="187219" y="6356350"/>
+            <a:ext cx="2743200" cy="365125"/>
+          </a:xfrm>
+        </p:spPr>
+        <p:txBody>
+          <a:bodyPr/>
+          <a:lstStyle/>
+          <a:p>
+            <a:r>
+              <a:rPr lang="en-US" dirty="0"/>
+              <a:t>8 May 2025</a:t>
+            </a:r>
+          </a:p>
+        </p:txBody>
+      </p:sp>
     </p:spTree>
     <p:extLst>
       <p:ext uri="{BB962C8B-B14F-4D97-AF65-F5344CB8AC3E}">
@@ -11224,130 +10921,56 @@
       </p:grpSpPr>
       <p:sp>
         <p:nvSpPr>
-          <p:cNvPr id="2" name="Title 1">
-            <a:extLst>
-              <a:ext uri="{FF2B5EF4-FFF2-40B4-BE49-F238E27FC236}">
-                <a16:creationId xmlns:a16="http://schemas.microsoft.com/office/drawing/2014/main" id="{B4E590C9-BC97-7834-5E47-C68E8721BCF1}"/>
+          <p:cNvPr id="6" name="Rectangle 5">
+            <a:extLst>
+              <a:ext uri="{FF2B5EF4-FFF2-40B4-BE49-F238E27FC236}">
+                <a16:creationId xmlns:a16="http://schemas.microsoft.com/office/drawing/2014/main" id="{59CE2097-EE29-99EA-8AC0-8A319645D244}"/>
               </a:ext>
             </a:extLst>
           </p:cNvPr>
           <p:cNvSpPr>
-            <a:spLocks noGrp="1"/>
-          </p:cNvSpPr>
-          <p:nvPr>
-            <p:ph type="title"/>
-          </p:nvPr>
+            <a:spLocks noGrp="1" noRot="1" noMove="1" noResize="1" noEditPoints="1" noAdjustHandles="1" noChangeArrowheads="1" noChangeShapeType="1"/>
+          </p:cNvSpPr>
+          <p:nvPr/>
         </p:nvSpPr>
         <p:spPr>
           <a:xfrm>
-            <a:off x="1634970" y="180069"/>
-            <a:ext cx="10378504" cy="963070"/>
+            <a:off x="9290756" y="6005689"/>
+            <a:ext cx="2943172" cy="841022"/>
           </a:xfrm>
+          <a:prstGeom prst="rect">
+            <a:avLst/>
+          </a:prstGeom>
           <a:solidFill>
-            <a:srgbClr val="003746"/>
+            <a:schemeClr val="bg1"/>
           </a:solidFill>
-          <a:ln w="19050">
+          <a:ln>
             <a:solidFill>
-              <a:srgbClr val="00FF78"/>
+              <a:schemeClr val="bg1"/>
             </a:solidFill>
           </a:ln>
         </p:spPr>
-        <p:txBody>
-          <a:bodyPr/>
-          <a:lstStyle/>
-          <a:p>
-            <a:r>
-              <a:rPr lang="en-US">
-                <a:solidFill>
-                  <a:srgbClr val="00FF78"/>
-                </a:solidFill>
-              </a:rPr>
-              <a:t>What is QUDT?</a:t>
-            </a:r>
-          </a:p>
-        </p:txBody>
-      </p:sp>
-      <p:sp>
-        <p:nvSpPr>
-          <p:cNvPr id="7" name="Date Placeholder 6">
-            <a:extLst>
-              <a:ext uri="{FF2B5EF4-FFF2-40B4-BE49-F238E27FC236}">
-                <a16:creationId xmlns:a16="http://schemas.microsoft.com/office/drawing/2014/main" id="{987C00E8-0F7E-AE66-7821-E96AE588555C}"/>
-              </a:ext>
-            </a:extLst>
-          </p:cNvPr>
-          <p:cNvSpPr>
-            <a:spLocks noGrp="1"/>
-          </p:cNvSpPr>
-          <p:nvPr>
-            <p:ph type="dt" sz="half" idx="10"/>
-          </p:nvPr>
-        </p:nvSpPr>
-        <p:spPr/>
-        <p:txBody>
-          <a:bodyPr/>
-          <a:lstStyle/>
-          <a:p>
-            <a:r>
-              <a:rPr lang="en-US"/>
-              <a:t>20th May, 2025</a:t>
-            </a:r>
-          </a:p>
-        </p:txBody>
-      </p:sp>
-      <p:sp>
-        <p:nvSpPr>
-          <p:cNvPr id="8" name="Footer Placeholder 7">
-            <a:extLst>
-              <a:ext uri="{FF2B5EF4-FFF2-40B4-BE49-F238E27FC236}">
-                <a16:creationId xmlns:a16="http://schemas.microsoft.com/office/drawing/2014/main" id="{D1D7CB71-9112-6DD0-4377-EF8C6BED1C66}"/>
-              </a:ext>
-            </a:extLst>
-          </p:cNvPr>
-          <p:cNvSpPr>
-            <a:spLocks noGrp="1"/>
-          </p:cNvSpPr>
-          <p:nvPr>
-            <p:ph type="ftr" sz="quarter" idx="11"/>
-          </p:nvPr>
-        </p:nvSpPr>
-        <p:spPr/>
-        <p:txBody>
-          <a:bodyPr/>
-          <a:lstStyle/>
-          <a:p>
-            <a:r>
-              <a:rPr lang="en-US"/>
-              <a:t>QUDT Introduction</a:t>
-            </a:r>
-          </a:p>
-        </p:txBody>
-      </p:sp>
-      <p:sp>
-        <p:nvSpPr>
-          <p:cNvPr id="9" name="Slide Number Placeholder 8">
-            <a:extLst>
-              <a:ext uri="{FF2B5EF4-FFF2-40B4-BE49-F238E27FC236}">
-                <a16:creationId xmlns:a16="http://schemas.microsoft.com/office/drawing/2014/main" id="{DAE01E17-6F99-D708-E638-D65023BBD718}"/>
-              </a:ext>
-            </a:extLst>
-          </p:cNvPr>
-          <p:cNvSpPr>
-            <a:spLocks noGrp="1"/>
-          </p:cNvSpPr>
-          <p:nvPr>
-            <p:ph type="sldNum" sz="quarter" idx="12"/>
-          </p:nvPr>
-        </p:nvSpPr>
-        <p:spPr/>
-        <p:txBody>
-          <a:bodyPr/>
-          <a:lstStyle/>
-          <a:p>
-            <a:fld id="{E8B94566-E730-314F-8C05-3849AEE21A50}" type="slidenum">
-              <a:rPr lang="en-US" smtClean="0"/>
-              <a:t>7</a:t>
-            </a:fld>
+        <p:style>
+          <a:lnRef idx="2">
+            <a:schemeClr val="accent1">
+              <a:shade val="15000"/>
+            </a:schemeClr>
+          </a:lnRef>
+          <a:fillRef idx="1">
+            <a:schemeClr val="accent1"/>
+          </a:fillRef>
+          <a:effectRef idx="0">
+            <a:schemeClr val="accent1"/>
+          </a:effectRef>
+          <a:fontRef idx="minor">
+            <a:schemeClr val="lt1"/>
+          </a:fontRef>
+        </p:style>
+        <p:txBody>
+          <a:bodyPr rtlCol="0" anchor="ctr"/>
+          <a:lstStyle/>
+          <a:p>
+            <a:pPr algn="ctr"/>
             <a:endParaRPr lang="en-US"/>
           </a:p>
         </p:txBody>
@@ -11401,7 +11024,7 @@
         </p:nvSpPr>
         <p:spPr>
           <a:xfrm>
-            <a:off x="7880989" y="2933458"/>
+            <a:off x="7880989" y="2878458"/>
             <a:ext cx="2238370" cy="523220"/>
           </a:xfrm>
           <a:prstGeom prst="rect">
@@ -11424,80 +11047,20 @@
       </p:sp>
       <p:sp>
         <p:nvSpPr>
-          <p:cNvPr id="3" name="TextBox 2">
-            <a:extLst>
-              <a:ext uri="{FF2B5EF4-FFF2-40B4-BE49-F238E27FC236}">
-                <a16:creationId xmlns:a16="http://schemas.microsoft.com/office/drawing/2014/main" id="{CC29FBCC-3095-F4F5-8888-78B55C11FAC3}"/>
-              </a:ext>
-            </a:extLst>
-          </p:cNvPr>
-          <p:cNvSpPr txBox="1"/>
+          <p:cNvPr id="5" name="Rounded Rectangle 3">
+            <a:extLst>
+              <a:ext uri="{FF2B5EF4-FFF2-40B4-BE49-F238E27FC236}">
+                <a16:creationId xmlns:a16="http://schemas.microsoft.com/office/drawing/2014/main" id="{92A95024-5570-08F4-9869-41F83224446A}"/>
+              </a:ext>
+            </a:extLst>
+          </p:cNvPr>
+          <p:cNvSpPr/>
           <p:nvPr/>
         </p:nvSpPr>
         <p:spPr>
           <a:xfrm>
-            <a:off x="6176592" y="1302060"/>
-            <a:ext cx="5902821" cy="1569660"/>
-          </a:xfrm>
-          <a:prstGeom prst="rect">
-            <a:avLst/>
-          </a:prstGeom>
-          <a:noFill/>
-        </p:spPr>
-        <p:txBody>
-          <a:bodyPr rot="0" spcFirstLastPara="0" vertOverflow="overflow" horzOverflow="overflow" vert="horz" wrap="square" lIns="91440" tIns="45720" rIns="91440" bIns="45720" numCol="1" spcCol="0" rtlCol="0" fromWordArt="0" anchor="t" anchorCtr="0" forceAA="0" compatLnSpc="1">
-            <a:prstTxWarp prst="textNoShape">
-              <a:avLst/>
-            </a:prstTxWarp>
-            <a:spAutoFit/>
-          </a:bodyPr>
-          <a:lstStyle/>
-          <a:p>
-            <a:pPr marL="285750" indent="-285750">
-              <a:buFont typeface="Arial"/>
-              <a:buChar char="•"/>
-            </a:pPr>
-            <a:r>
-              <a:rPr lang="en-GB" sz="2400" dirty="0">
-                <a:ea typeface="Calibri"/>
-                <a:cs typeface="Calibri"/>
-              </a:rPr>
-              <a:t>Options for alignment between IDO and QUDT classes and vocabularies are being explored</a:t>
-            </a:r>
-            <a:endParaRPr lang="en-US" sz="2400" dirty="0"/>
-          </a:p>
-          <a:p>
-            <a:pPr marL="285750" indent="-285750">
-              <a:buFont typeface="Arial"/>
-              <a:buChar char="•"/>
-            </a:pPr>
-            <a:r>
-              <a:rPr lang="en-GB" sz="2400" dirty="0">
-                <a:ea typeface="Calibri"/>
-                <a:cs typeface="Calibri"/>
-              </a:rPr>
-              <a:t>Will lead to improvements to IDO &amp; QUDT</a:t>
-            </a:r>
-            <a:endParaRPr lang="en-GB" sz="2400" dirty="0"/>
-          </a:p>
-        </p:txBody>
-      </p:sp>
-      <p:sp>
-        <p:nvSpPr>
-          <p:cNvPr id="5" name="Rounded Rectangle 3">
-            <a:extLst>
-              <a:ext uri="{FF2B5EF4-FFF2-40B4-BE49-F238E27FC236}">
-                <a16:creationId xmlns:a16="http://schemas.microsoft.com/office/drawing/2014/main" id="{92A95024-5570-08F4-9869-41F83224446A}"/>
-              </a:ext>
-            </a:extLst>
-          </p:cNvPr>
-          <p:cNvSpPr/>
-          <p:nvPr/>
-        </p:nvSpPr>
-        <p:spPr>
-          <a:xfrm>
-            <a:off x="6047031" y="3399973"/>
-            <a:ext cx="6140613" cy="3036627"/>
+            <a:off x="6047031" y="3344973"/>
+            <a:ext cx="6140613" cy="3123711"/>
           </a:xfrm>
           <a:prstGeom prst="roundRect">
             <a:avLst>
@@ -11689,16 +11252,1115 @@
           </a:prstGeom>
         </p:spPr>
       </p:pic>
+      <p:sp>
+        <p:nvSpPr>
+          <p:cNvPr id="3" name="TextBox 2">
+            <a:extLst>
+              <a:ext uri="{FF2B5EF4-FFF2-40B4-BE49-F238E27FC236}">
+                <a16:creationId xmlns:a16="http://schemas.microsoft.com/office/drawing/2014/main" id="{8ABC85FB-F6CC-E40B-3E67-8358820FF0F7}"/>
+              </a:ext>
+            </a:extLst>
+          </p:cNvPr>
+          <p:cNvSpPr txBox="1"/>
+          <p:nvPr/>
+        </p:nvSpPr>
+        <p:spPr>
+          <a:xfrm>
+            <a:off x="1558819" y="4468857"/>
+            <a:ext cx="2251257" cy="523220"/>
+          </a:xfrm>
+          <a:prstGeom prst="rect">
+            <a:avLst/>
+          </a:prstGeom>
+          <a:noFill/>
+        </p:spPr>
+        <p:txBody>
+          <a:bodyPr wrap="none" rtlCol="0">
+            <a:spAutoFit/>
+          </a:bodyPr>
+          <a:lstStyle/>
+          <a:p>
+            <a:r>
+              <a:rPr lang="en-US" sz="2800" dirty="0"/>
+              <a:t>Core concepts</a:t>
+            </a:r>
+          </a:p>
+        </p:txBody>
+      </p:sp>
+      <p:sp>
+        <p:nvSpPr>
+          <p:cNvPr id="4" name="Rectangle 3">
+            <a:extLst>
+              <a:ext uri="{FF2B5EF4-FFF2-40B4-BE49-F238E27FC236}">
+                <a16:creationId xmlns:a16="http://schemas.microsoft.com/office/drawing/2014/main" id="{C4F18D3E-CF8F-083A-3447-D3DC33C45D6D}"/>
+              </a:ext>
+            </a:extLst>
+          </p:cNvPr>
+          <p:cNvSpPr/>
+          <p:nvPr/>
+        </p:nvSpPr>
+        <p:spPr>
+          <a:xfrm>
+            <a:off x="1333786" y="1470453"/>
+            <a:ext cx="1409414" cy="310221"/>
+          </a:xfrm>
+          <a:prstGeom prst="rect">
+            <a:avLst/>
+          </a:prstGeom>
+          <a:noFill/>
+          <a:ln w="38100">
+            <a:solidFill>
+              <a:srgbClr val="FF0000"/>
+            </a:solidFill>
+          </a:ln>
+        </p:spPr>
+        <p:style>
+          <a:lnRef idx="2">
+            <a:schemeClr val="accent1">
+              <a:shade val="15000"/>
+            </a:schemeClr>
+          </a:lnRef>
+          <a:fillRef idx="1">
+            <a:schemeClr val="accent1"/>
+          </a:fillRef>
+          <a:effectRef idx="0">
+            <a:schemeClr val="accent1"/>
+          </a:effectRef>
+          <a:fontRef idx="minor">
+            <a:schemeClr val="lt1"/>
+          </a:fontRef>
+        </p:style>
+        <p:txBody>
+          <a:bodyPr rtlCol="0" anchor="ctr"/>
+          <a:lstStyle/>
+          <a:p>
+            <a:pPr algn="ctr"/>
+            <a:endParaRPr lang="en-US"/>
+          </a:p>
+        </p:txBody>
+      </p:sp>
+      <p:sp>
+        <p:nvSpPr>
+          <p:cNvPr id="7" name="Rectangle 6">
+            <a:extLst>
+              <a:ext uri="{FF2B5EF4-FFF2-40B4-BE49-F238E27FC236}">
+                <a16:creationId xmlns:a16="http://schemas.microsoft.com/office/drawing/2014/main" id="{32B20178-F463-22E5-7292-1A7793152CCB}"/>
+              </a:ext>
+            </a:extLst>
+          </p:cNvPr>
+          <p:cNvSpPr/>
+          <p:nvPr/>
+        </p:nvSpPr>
+        <p:spPr>
+          <a:xfrm>
+            <a:off x="1343454" y="3851695"/>
+            <a:ext cx="1385996" cy="282019"/>
+          </a:xfrm>
+          <a:prstGeom prst="rect">
+            <a:avLst/>
+          </a:prstGeom>
+          <a:noFill/>
+          <a:ln w="38100">
+            <a:solidFill>
+              <a:srgbClr val="FF0000"/>
+            </a:solidFill>
+          </a:ln>
+        </p:spPr>
+        <p:style>
+          <a:lnRef idx="2">
+            <a:schemeClr val="accent1">
+              <a:shade val="15000"/>
+            </a:schemeClr>
+          </a:lnRef>
+          <a:fillRef idx="1">
+            <a:schemeClr val="accent1"/>
+          </a:fillRef>
+          <a:effectRef idx="0">
+            <a:schemeClr val="accent1"/>
+          </a:effectRef>
+          <a:fontRef idx="minor">
+            <a:schemeClr val="lt1"/>
+          </a:fontRef>
+        </p:style>
+        <p:txBody>
+          <a:bodyPr rtlCol="0" anchor="ctr"/>
+          <a:lstStyle/>
+          <a:p>
+            <a:pPr algn="ctr"/>
+            <a:endParaRPr lang="en-US"/>
+          </a:p>
+        </p:txBody>
+      </p:sp>
+      <p:sp>
+        <p:nvSpPr>
+          <p:cNvPr id="8" name="Rectangle 7">
+            <a:extLst>
+              <a:ext uri="{FF2B5EF4-FFF2-40B4-BE49-F238E27FC236}">
+                <a16:creationId xmlns:a16="http://schemas.microsoft.com/office/drawing/2014/main" id="{92CF30F6-7186-732B-89E4-9B6DF46C8BD5}"/>
+              </a:ext>
+            </a:extLst>
+          </p:cNvPr>
+          <p:cNvSpPr/>
+          <p:nvPr/>
+        </p:nvSpPr>
+        <p:spPr>
+          <a:xfrm>
+            <a:off x="2301929" y="2668800"/>
+            <a:ext cx="1409414" cy="310221"/>
+          </a:xfrm>
+          <a:prstGeom prst="rect">
+            <a:avLst/>
+          </a:prstGeom>
+          <a:noFill/>
+          <a:ln w="38100">
+            <a:solidFill>
+              <a:srgbClr val="FF0000"/>
+            </a:solidFill>
+          </a:ln>
+        </p:spPr>
+        <p:style>
+          <a:lnRef idx="2">
+            <a:schemeClr val="accent1">
+              <a:shade val="15000"/>
+            </a:schemeClr>
+          </a:lnRef>
+          <a:fillRef idx="1">
+            <a:schemeClr val="accent1"/>
+          </a:fillRef>
+          <a:effectRef idx="0">
+            <a:schemeClr val="accent1"/>
+          </a:effectRef>
+          <a:fontRef idx="minor">
+            <a:schemeClr val="lt1"/>
+          </a:fontRef>
+        </p:style>
+        <p:txBody>
+          <a:bodyPr rtlCol="0" anchor="ctr"/>
+          <a:lstStyle/>
+          <a:p>
+            <a:pPr algn="ctr"/>
+            <a:endParaRPr lang="en-US"/>
+          </a:p>
+        </p:txBody>
+      </p:sp>
+      <p:cxnSp>
+        <p:nvCxnSpPr>
+          <p:cNvPr id="10" name="Straight Arrow Connector 9">
+            <a:extLst>
+              <a:ext uri="{FF2B5EF4-FFF2-40B4-BE49-F238E27FC236}">
+                <a16:creationId xmlns:a16="http://schemas.microsoft.com/office/drawing/2014/main" id="{BC26F4CE-88F7-50DC-5C6B-B908F69C5131}"/>
+              </a:ext>
+            </a:extLst>
+          </p:cNvPr>
+          <p:cNvCxnSpPr>
+            <a:cxnSpLocks/>
+            <a:stCxn id="4" idx="2"/>
+            <a:endCxn id="7" idx="0"/>
+          </p:cNvCxnSpPr>
+          <p:nvPr/>
+        </p:nvCxnSpPr>
+        <p:spPr>
+          <a:xfrm flipH="1">
+            <a:off x="2036452" y="1780674"/>
+            <a:ext cx="2041" cy="2071021"/>
+          </a:xfrm>
+          <a:prstGeom prst="straightConnector1">
+            <a:avLst/>
+          </a:prstGeom>
+          <a:ln w="38100">
+            <a:solidFill>
+              <a:srgbClr val="FF0000"/>
+            </a:solidFill>
+            <a:tailEnd type="triangle"/>
+          </a:ln>
+        </p:spPr>
+        <p:style>
+          <a:lnRef idx="2">
+            <a:schemeClr val="accent1"/>
+          </a:lnRef>
+          <a:fillRef idx="0">
+            <a:schemeClr val="accent1"/>
+          </a:fillRef>
+          <a:effectRef idx="1">
+            <a:schemeClr val="accent1"/>
+          </a:effectRef>
+          <a:fontRef idx="minor">
+            <a:schemeClr val="tx1"/>
+          </a:fontRef>
+        </p:style>
+      </p:cxnSp>
+      <p:cxnSp>
+        <p:nvCxnSpPr>
+          <p:cNvPr id="12" name="Straight Arrow Connector 11">
+            <a:extLst>
+              <a:ext uri="{FF2B5EF4-FFF2-40B4-BE49-F238E27FC236}">
+                <a16:creationId xmlns:a16="http://schemas.microsoft.com/office/drawing/2014/main" id="{E0B8B08F-4B55-8C09-F6F1-68A9BDECD19F}"/>
+              </a:ext>
+            </a:extLst>
+          </p:cNvPr>
+          <p:cNvCxnSpPr>
+            <a:cxnSpLocks/>
+          </p:cNvCxnSpPr>
+          <p:nvPr/>
+        </p:nvCxnSpPr>
+        <p:spPr>
+          <a:xfrm flipV="1">
+            <a:off x="2174239" y="2979021"/>
+            <a:ext cx="700639" cy="872673"/>
+          </a:xfrm>
+          <a:prstGeom prst="straightConnector1">
+            <a:avLst/>
+          </a:prstGeom>
+          <a:ln w="38100">
+            <a:solidFill>
+              <a:srgbClr val="FF0000"/>
+            </a:solidFill>
+            <a:tailEnd type="triangle"/>
+          </a:ln>
+        </p:spPr>
+        <p:style>
+          <a:lnRef idx="2">
+            <a:schemeClr val="accent1"/>
+          </a:lnRef>
+          <a:fillRef idx="0">
+            <a:schemeClr val="accent1"/>
+          </a:fillRef>
+          <a:effectRef idx="1">
+            <a:schemeClr val="accent1"/>
+          </a:effectRef>
+          <a:fontRef idx="minor">
+            <a:schemeClr val="tx1"/>
+          </a:fontRef>
+        </p:style>
+      </p:cxnSp>
+      <p:sp>
+        <p:nvSpPr>
+          <p:cNvPr id="24" name="Rectangle 23">
+            <a:extLst>
+              <a:ext uri="{FF2B5EF4-FFF2-40B4-BE49-F238E27FC236}">
+                <a16:creationId xmlns:a16="http://schemas.microsoft.com/office/drawing/2014/main" id="{D6C71ECB-AD40-1106-930F-99A35DF0A625}"/>
+              </a:ext>
+            </a:extLst>
+          </p:cNvPr>
+          <p:cNvSpPr/>
+          <p:nvPr/>
+        </p:nvSpPr>
+        <p:spPr>
+          <a:xfrm>
+            <a:off x="6360694" y="5716094"/>
+            <a:ext cx="2143913" cy="251570"/>
+          </a:xfrm>
+          <a:prstGeom prst="rect">
+            <a:avLst/>
+          </a:prstGeom>
+          <a:noFill/>
+          <a:ln w="38100">
+            <a:solidFill>
+              <a:srgbClr val="FF0000"/>
+            </a:solidFill>
+          </a:ln>
+        </p:spPr>
+        <p:style>
+          <a:lnRef idx="2">
+            <a:schemeClr val="accent1">
+              <a:shade val="15000"/>
+            </a:schemeClr>
+          </a:lnRef>
+          <a:fillRef idx="1">
+            <a:schemeClr val="accent1"/>
+          </a:fillRef>
+          <a:effectRef idx="0">
+            <a:schemeClr val="accent1"/>
+          </a:effectRef>
+          <a:fontRef idx="minor">
+            <a:schemeClr val="lt1"/>
+          </a:fontRef>
+        </p:style>
+        <p:txBody>
+          <a:bodyPr rtlCol="0" anchor="ctr"/>
+          <a:lstStyle/>
+          <a:p>
+            <a:pPr algn="ctr"/>
+            <a:endParaRPr lang="en-US"/>
+          </a:p>
+        </p:txBody>
+      </p:sp>
+      <p:sp>
+        <p:nvSpPr>
+          <p:cNvPr id="25" name="Rectangle 24">
+            <a:extLst>
+              <a:ext uri="{FF2B5EF4-FFF2-40B4-BE49-F238E27FC236}">
+                <a16:creationId xmlns:a16="http://schemas.microsoft.com/office/drawing/2014/main" id="{6B1F1676-5646-D392-6BBB-1F32AFB9106A}"/>
+              </a:ext>
+            </a:extLst>
+          </p:cNvPr>
+          <p:cNvSpPr/>
+          <p:nvPr/>
+        </p:nvSpPr>
+        <p:spPr>
+          <a:xfrm>
+            <a:off x="10010274" y="5712869"/>
+            <a:ext cx="1738058" cy="251570"/>
+          </a:xfrm>
+          <a:prstGeom prst="rect">
+            <a:avLst/>
+          </a:prstGeom>
+          <a:noFill/>
+          <a:ln w="38100">
+            <a:solidFill>
+              <a:srgbClr val="FF0000"/>
+            </a:solidFill>
+          </a:ln>
+        </p:spPr>
+        <p:style>
+          <a:lnRef idx="2">
+            <a:schemeClr val="accent1">
+              <a:shade val="15000"/>
+            </a:schemeClr>
+          </a:lnRef>
+          <a:fillRef idx="1">
+            <a:schemeClr val="accent1"/>
+          </a:fillRef>
+          <a:effectRef idx="0">
+            <a:schemeClr val="accent1"/>
+          </a:effectRef>
+          <a:fontRef idx="minor">
+            <a:schemeClr val="lt1"/>
+          </a:fontRef>
+        </p:style>
+        <p:txBody>
+          <a:bodyPr rtlCol="0" anchor="ctr"/>
+          <a:lstStyle/>
+          <a:p>
+            <a:pPr algn="ctr"/>
+            <a:endParaRPr lang="en-US"/>
+          </a:p>
+        </p:txBody>
+      </p:sp>
+      <p:cxnSp>
+        <p:nvCxnSpPr>
+          <p:cNvPr id="26" name="Straight Arrow Connector 25">
+            <a:extLst>
+              <a:ext uri="{FF2B5EF4-FFF2-40B4-BE49-F238E27FC236}">
+                <a16:creationId xmlns:a16="http://schemas.microsoft.com/office/drawing/2014/main" id="{0E8458FF-B581-8ABE-CEA4-246627439913}"/>
+              </a:ext>
+            </a:extLst>
+          </p:cNvPr>
+          <p:cNvCxnSpPr>
+            <a:cxnSpLocks/>
+          </p:cNvCxnSpPr>
+          <p:nvPr/>
+        </p:nvCxnSpPr>
+        <p:spPr>
+          <a:xfrm>
+            <a:off x="8497732" y="5841879"/>
+            <a:ext cx="1512542" cy="3650"/>
+          </a:xfrm>
+          <a:prstGeom prst="straightConnector1">
+            <a:avLst/>
+          </a:prstGeom>
+          <a:ln w="38100">
+            <a:solidFill>
+              <a:srgbClr val="FF0000"/>
+            </a:solidFill>
+            <a:tailEnd type="triangle"/>
+          </a:ln>
+        </p:spPr>
+        <p:style>
+          <a:lnRef idx="2">
+            <a:schemeClr val="accent1"/>
+          </a:lnRef>
+          <a:fillRef idx="0">
+            <a:schemeClr val="accent1"/>
+          </a:fillRef>
+          <a:effectRef idx="1">
+            <a:schemeClr val="accent1"/>
+          </a:effectRef>
+          <a:fontRef idx="minor">
+            <a:schemeClr val="tx1"/>
+          </a:fontRef>
+        </p:style>
+      </p:cxnSp>
+      <p:sp>
+        <p:nvSpPr>
+          <p:cNvPr id="30" name="Rectangle 29">
+            <a:extLst>
+              <a:ext uri="{FF2B5EF4-FFF2-40B4-BE49-F238E27FC236}">
+                <a16:creationId xmlns:a16="http://schemas.microsoft.com/office/drawing/2014/main" id="{B01B59FD-01C1-64E2-4FD9-DBC411A31D66}"/>
+              </a:ext>
+            </a:extLst>
+          </p:cNvPr>
+          <p:cNvSpPr/>
+          <p:nvPr/>
+        </p:nvSpPr>
+        <p:spPr>
+          <a:xfrm>
+            <a:off x="9996523" y="4673064"/>
+            <a:ext cx="1738058" cy="251570"/>
+          </a:xfrm>
+          <a:prstGeom prst="rect">
+            <a:avLst/>
+          </a:prstGeom>
+          <a:noFill/>
+          <a:ln w="38100">
+            <a:solidFill>
+              <a:srgbClr val="FF0000"/>
+            </a:solidFill>
+          </a:ln>
+        </p:spPr>
+        <p:style>
+          <a:lnRef idx="2">
+            <a:schemeClr val="accent1">
+              <a:shade val="15000"/>
+            </a:schemeClr>
+          </a:lnRef>
+          <a:fillRef idx="1">
+            <a:schemeClr val="accent1"/>
+          </a:fillRef>
+          <a:effectRef idx="0">
+            <a:schemeClr val="accent1"/>
+          </a:effectRef>
+          <a:fontRef idx="minor">
+            <a:schemeClr val="lt1"/>
+          </a:fontRef>
+        </p:style>
+        <p:txBody>
+          <a:bodyPr rtlCol="0" anchor="ctr"/>
+          <a:lstStyle/>
+          <a:p>
+            <a:pPr algn="ctr"/>
+            <a:endParaRPr lang="en-US"/>
+          </a:p>
+        </p:txBody>
+      </p:sp>
+      <p:cxnSp>
+        <p:nvCxnSpPr>
+          <p:cNvPr id="31" name="Straight Arrow Connector 30">
+            <a:extLst>
+              <a:ext uri="{FF2B5EF4-FFF2-40B4-BE49-F238E27FC236}">
+                <a16:creationId xmlns:a16="http://schemas.microsoft.com/office/drawing/2014/main" id="{F4B2DE70-5EBF-E3CA-3FD9-DB4951D85592}"/>
+              </a:ext>
+            </a:extLst>
+          </p:cNvPr>
+          <p:cNvCxnSpPr>
+            <a:cxnSpLocks/>
+            <a:stCxn id="25" idx="0"/>
+          </p:cNvCxnSpPr>
+          <p:nvPr/>
+        </p:nvCxnSpPr>
+        <p:spPr>
+          <a:xfrm flipH="1" flipV="1">
+            <a:off x="10876549" y="4897134"/>
+            <a:ext cx="2754" cy="815735"/>
+          </a:xfrm>
+          <a:prstGeom prst="straightConnector1">
+            <a:avLst/>
+          </a:prstGeom>
+          <a:ln w="38100">
+            <a:solidFill>
+              <a:srgbClr val="FF0000"/>
+            </a:solidFill>
+            <a:tailEnd type="triangle"/>
+          </a:ln>
+        </p:spPr>
+        <p:style>
+          <a:lnRef idx="2">
+            <a:schemeClr val="accent1"/>
+          </a:lnRef>
+          <a:fillRef idx="0">
+            <a:schemeClr val="accent1"/>
+          </a:fillRef>
+          <a:effectRef idx="1">
+            <a:schemeClr val="accent1"/>
+          </a:effectRef>
+          <a:fontRef idx="minor">
+            <a:schemeClr val="tx1"/>
+          </a:fontRef>
+        </p:style>
+      </p:cxnSp>
+      <p:sp>
+        <p:nvSpPr>
+          <p:cNvPr id="18" name="Title 1">
+            <a:extLst>
+              <a:ext uri="{FF2B5EF4-FFF2-40B4-BE49-F238E27FC236}">
+                <a16:creationId xmlns:a16="http://schemas.microsoft.com/office/drawing/2014/main" id="{4FE96B20-068F-90FE-AB01-FE66CC601E46}"/>
+              </a:ext>
+            </a:extLst>
+          </p:cNvPr>
+          <p:cNvSpPr>
+            <a:spLocks noGrp="1"/>
+          </p:cNvSpPr>
+          <p:nvPr>
+            <p:ph type="title"/>
+          </p:nvPr>
+        </p:nvSpPr>
+        <p:spPr>
+          <a:xfrm>
+            <a:off x="1620456" y="136526"/>
+            <a:ext cx="10378504" cy="963070"/>
+          </a:xfrm>
+          <a:solidFill>
+            <a:srgbClr val="003746"/>
+          </a:solidFill>
+          <a:ln w="19050">
+            <a:solidFill>
+              <a:srgbClr val="00FF78"/>
+            </a:solidFill>
+          </a:ln>
+        </p:spPr>
+        <p:txBody>
+          <a:bodyPr/>
+          <a:lstStyle/>
+          <a:p>
+            <a:r>
+              <a:rPr lang="en-US" dirty="0">
+                <a:solidFill>
+                  <a:srgbClr val="00FF78"/>
+                </a:solidFill>
+              </a:rPr>
+              <a:t>Core Concepts</a:t>
+            </a:r>
+          </a:p>
+        </p:txBody>
+      </p:sp>
     </p:spTree>
     <p:extLst>
       <p:ext uri="{BB962C8B-B14F-4D97-AF65-F5344CB8AC3E}">
-        <p14:creationId xmlns:p14="http://schemas.microsoft.com/office/powerpoint/2010/main" val="2127218485"/>
+        <p14:creationId xmlns:p14="http://schemas.microsoft.com/office/powerpoint/2010/main" val="3359589053"/>
       </p:ext>
     </p:extLst>
   </p:cSld>
   <p:clrMapOvr>
     <a:masterClrMapping/>
   </p:clrMapOvr>
+  <p:timing>
+    <p:tnLst>
+      <p:par>
+        <p:cTn id="1" dur="indefinite" restart="never" nodeType="tmRoot">
+          <p:childTnLst>
+            <p:seq concurrent="1" nextAc="seek">
+              <p:cTn id="2" dur="indefinite" nodeType="mainSeq">
+                <p:childTnLst>
+                  <p:par>
+                    <p:cTn id="3" fill="hold">
+                      <p:stCondLst>
+                        <p:cond delay="indefinite"/>
+                      </p:stCondLst>
+                      <p:childTnLst>
+                        <p:par>
+                          <p:cTn id="4" fill="hold">
+                            <p:stCondLst>
+                              <p:cond delay="0"/>
+                            </p:stCondLst>
+                            <p:childTnLst>
+                              <p:par>
+                                <p:cTn id="5" presetID="1" presetClass="entr" presetSubtype="0" fill="hold" grpId="0" nodeType="clickEffect">
+                                  <p:stCondLst>
+                                    <p:cond delay="0"/>
+                                  </p:stCondLst>
+                                  <p:childTnLst>
+                                    <p:set>
+                                      <p:cBhvr>
+                                        <p:cTn id="6" dur="1" fill="hold">
+                                          <p:stCondLst>
+                                            <p:cond delay="0"/>
+                                          </p:stCondLst>
+                                        </p:cTn>
+                                        <p:tgtEl>
+                                          <p:spTgt spid="4"/>
+                                        </p:tgtEl>
+                                        <p:attrNameLst>
+                                          <p:attrName>style.visibility</p:attrName>
+                                        </p:attrNameLst>
+                                      </p:cBhvr>
+                                      <p:to>
+                                        <p:strVal val="visible"/>
+                                      </p:to>
+                                    </p:set>
+                                  </p:childTnLst>
+                                </p:cTn>
+                              </p:par>
+                              <p:par>
+                                <p:cTn id="7" presetID="1" presetClass="entr" presetSubtype="0" fill="hold" grpId="0" nodeType="withEffect">
+                                  <p:stCondLst>
+                                    <p:cond delay="0"/>
+                                  </p:stCondLst>
+                                  <p:childTnLst>
+                                    <p:set>
+                                      <p:cBhvr>
+                                        <p:cTn id="8" dur="1" fill="hold">
+                                          <p:stCondLst>
+                                            <p:cond delay="0"/>
+                                          </p:stCondLst>
+                                        </p:cTn>
+                                        <p:tgtEl>
+                                          <p:spTgt spid="24"/>
+                                        </p:tgtEl>
+                                        <p:attrNameLst>
+                                          <p:attrName>style.visibility</p:attrName>
+                                        </p:attrNameLst>
+                                      </p:cBhvr>
+                                      <p:to>
+                                        <p:strVal val="visible"/>
+                                      </p:to>
+                                    </p:set>
+                                  </p:childTnLst>
+                                </p:cTn>
+                              </p:par>
+                            </p:childTnLst>
+                          </p:cTn>
+                        </p:par>
+                      </p:childTnLst>
+                    </p:cTn>
+                  </p:par>
+                  <p:par>
+                    <p:cTn id="9" fill="hold">
+                      <p:stCondLst>
+                        <p:cond delay="indefinite"/>
+                      </p:stCondLst>
+                      <p:childTnLst>
+                        <p:par>
+                          <p:cTn id="10" fill="hold">
+                            <p:stCondLst>
+                              <p:cond delay="0"/>
+                            </p:stCondLst>
+                            <p:childTnLst>
+                              <p:par>
+                                <p:cTn id="11" presetID="1" presetClass="entr" presetSubtype="0" fill="hold" nodeType="clickEffect">
+                                  <p:stCondLst>
+                                    <p:cond delay="0"/>
+                                  </p:stCondLst>
+                                  <p:childTnLst>
+                                    <p:set>
+                                      <p:cBhvr>
+                                        <p:cTn id="12" dur="1" fill="hold">
+                                          <p:stCondLst>
+                                            <p:cond delay="0"/>
+                                          </p:stCondLst>
+                                        </p:cTn>
+                                        <p:tgtEl>
+                                          <p:spTgt spid="10"/>
+                                        </p:tgtEl>
+                                        <p:attrNameLst>
+                                          <p:attrName>style.visibility</p:attrName>
+                                        </p:attrNameLst>
+                                      </p:cBhvr>
+                                      <p:to>
+                                        <p:strVal val="visible"/>
+                                      </p:to>
+                                    </p:set>
+                                  </p:childTnLst>
+                                </p:cTn>
+                              </p:par>
+                              <p:par>
+                                <p:cTn id="13" presetID="1" presetClass="entr" presetSubtype="0" fill="hold" grpId="0" nodeType="withEffect">
+                                  <p:stCondLst>
+                                    <p:cond delay="0"/>
+                                  </p:stCondLst>
+                                  <p:childTnLst>
+                                    <p:set>
+                                      <p:cBhvr>
+                                        <p:cTn id="14" dur="1" fill="hold">
+                                          <p:stCondLst>
+                                            <p:cond delay="0"/>
+                                          </p:stCondLst>
+                                        </p:cTn>
+                                        <p:tgtEl>
+                                          <p:spTgt spid="7"/>
+                                        </p:tgtEl>
+                                        <p:attrNameLst>
+                                          <p:attrName>style.visibility</p:attrName>
+                                        </p:attrNameLst>
+                                      </p:cBhvr>
+                                      <p:to>
+                                        <p:strVal val="visible"/>
+                                      </p:to>
+                                    </p:set>
+                                  </p:childTnLst>
+                                </p:cTn>
+                              </p:par>
+                              <p:par>
+                                <p:cTn id="15" presetID="1" presetClass="entr" presetSubtype="0" fill="hold" nodeType="withEffect">
+                                  <p:stCondLst>
+                                    <p:cond delay="0"/>
+                                  </p:stCondLst>
+                                  <p:childTnLst>
+                                    <p:set>
+                                      <p:cBhvr>
+                                        <p:cTn id="16" dur="1" fill="hold">
+                                          <p:stCondLst>
+                                            <p:cond delay="0"/>
+                                          </p:stCondLst>
+                                        </p:cTn>
+                                        <p:tgtEl>
+                                          <p:spTgt spid="26"/>
+                                        </p:tgtEl>
+                                        <p:attrNameLst>
+                                          <p:attrName>style.visibility</p:attrName>
+                                        </p:attrNameLst>
+                                      </p:cBhvr>
+                                      <p:to>
+                                        <p:strVal val="visible"/>
+                                      </p:to>
+                                    </p:set>
+                                  </p:childTnLst>
+                                </p:cTn>
+                              </p:par>
+                              <p:par>
+                                <p:cTn id="17" presetID="1" presetClass="entr" presetSubtype="0" fill="hold" grpId="0" nodeType="withEffect">
+                                  <p:stCondLst>
+                                    <p:cond delay="0"/>
+                                  </p:stCondLst>
+                                  <p:childTnLst>
+                                    <p:set>
+                                      <p:cBhvr>
+                                        <p:cTn id="18" dur="1" fill="hold">
+                                          <p:stCondLst>
+                                            <p:cond delay="0"/>
+                                          </p:stCondLst>
+                                        </p:cTn>
+                                        <p:tgtEl>
+                                          <p:spTgt spid="25"/>
+                                        </p:tgtEl>
+                                        <p:attrNameLst>
+                                          <p:attrName>style.visibility</p:attrName>
+                                        </p:attrNameLst>
+                                      </p:cBhvr>
+                                      <p:to>
+                                        <p:strVal val="visible"/>
+                                      </p:to>
+                                    </p:set>
+                                  </p:childTnLst>
+                                </p:cTn>
+                              </p:par>
+                              <p:par>
+                                <p:cTn id="19" presetID="1" presetClass="exit" presetSubtype="0" fill="hold" grpId="1" nodeType="withEffect">
+                                  <p:stCondLst>
+                                    <p:cond delay="0"/>
+                                  </p:stCondLst>
+                                  <p:childTnLst>
+                                    <p:set>
+                                      <p:cBhvr>
+                                        <p:cTn id="20" dur="1" fill="hold">
+                                          <p:stCondLst>
+                                            <p:cond delay="0"/>
+                                          </p:stCondLst>
+                                        </p:cTn>
+                                        <p:tgtEl>
+                                          <p:spTgt spid="4"/>
+                                        </p:tgtEl>
+                                        <p:attrNameLst>
+                                          <p:attrName>style.visibility</p:attrName>
+                                        </p:attrNameLst>
+                                      </p:cBhvr>
+                                      <p:to>
+                                        <p:strVal val="hidden"/>
+                                      </p:to>
+                                    </p:set>
+                                  </p:childTnLst>
+                                </p:cTn>
+                              </p:par>
+                              <p:par>
+                                <p:cTn id="21" presetID="1" presetClass="exit" presetSubtype="0" fill="hold" grpId="1" nodeType="withEffect">
+                                  <p:stCondLst>
+                                    <p:cond delay="0"/>
+                                  </p:stCondLst>
+                                  <p:childTnLst>
+                                    <p:set>
+                                      <p:cBhvr>
+                                        <p:cTn id="22" dur="1" fill="hold">
+                                          <p:stCondLst>
+                                            <p:cond delay="0"/>
+                                          </p:stCondLst>
+                                        </p:cTn>
+                                        <p:tgtEl>
+                                          <p:spTgt spid="24"/>
+                                        </p:tgtEl>
+                                        <p:attrNameLst>
+                                          <p:attrName>style.visibility</p:attrName>
+                                        </p:attrNameLst>
+                                      </p:cBhvr>
+                                      <p:to>
+                                        <p:strVal val="hidden"/>
+                                      </p:to>
+                                    </p:set>
+                                  </p:childTnLst>
+                                </p:cTn>
+                              </p:par>
+                            </p:childTnLst>
+                          </p:cTn>
+                        </p:par>
+                      </p:childTnLst>
+                    </p:cTn>
+                  </p:par>
+                  <p:par>
+                    <p:cTn id="23" fill="hold">
+                      <p:stCondLst>
+                        <p:cond delay="indefinite"/>
+                      </p:stCondLst>
+                      <p:childTnLst>
+                        <p:par>
+                          <p:cTn id="24" fill="hold">
+                            <p:stCondLst>
+                              <p:cond delay="0"/>
+                            </p:stCondLst>
+                            <p:childTnLst>
+                              <p:par>
+                                <p:cTn id="25" presetID="1" presetClass="entr" presetSubtype="0" fill="hold" nodeType="clickEffect">
+                                  <p:stCondLst>
+                                    <p:cond delay="0"/>
+                                  </p:stCondLst>
+                                  <p:childTnLst>
+                                    <p:set>
+                                      <p:cBhvr>
+                                        <p:cTn id="26" dur="1" fill="hold">
+                                          <p:stCondLst>
+                                            <p:cond delay="0"/>
+                                          </p:stCondLst>
+                                        </p:cTn>
+                                        <p:tgtEl>
+                                          <p:spTgt spid="12"/>
+                                        </p:tgtEl>
+                                        <p:attrNameLst>
+                                          <p:attrName>style.visibility</p:attrName>
+                                        </p:attrNameLst>
+                                      </p:cBhvr>
+                                      <p:to>
+                                        <p:strVal val="visible"/>
+                                      </p:to>
+                                    </p:set>
+                                  </p:childTnLst>
+                                </p:cTn>
+                              </p:par>
+                              <p:par>
+                                <p:cTn id="27" presetID="1" presetClass="entr" presetSubtype="0" fill="hold" grpId="0" nodeType="withEffect">
+                                  <p:stCondLst>
+                                    <p:cond delay="0"/>
+                                  </p:stCondLst>
+                                  <p:childTnLst>
+                                    <p:set>
+                                      <p:cBhvr>
+                                        <p:cTn id="28" dur="1" fill="hold">
+                                          <p:stCondLst>
+                                            <p:cond delay="0"/>
+                                          </p:stCondLst>
+                                        </p:cTn>
+                                        <p:tgtEl>
+                                          <p:spTgt spid="8"/>
+                                        </p:tgtEl>
+                                        <p:attrNameLst>
+                                          <p:attrName>style.visibility</p:attrName>
+                                        </p:attrNameLst>
+                                      </p:cBhvr>
+                                      <p:to>
+                                        <p:strVal val="visible"/>
+                                      </p:to>
+                                    </p:set>
+                                  </p:childTnLst>
+                                </p:cTn>
+                              </p:par>
+                              <p:par>
+                                <p:cTn id="29" presetID="1" presetClass="entr" presetSubtype="0" fill="hold" nodeType="withEffect">
+                                  <p:stCondLst>
+                                    <p:cond delay="0"/>
+                                  </p:stCondLst>
+                                  <p:childTnLst>
+                                    <p:set>
+                                      <p:cBhvr>
+                                        <p:cTn id="30" dur="1" fill="hold">
+                                          <p:stCondLst>
+                                            <p:cond delay="0"/>
+                                          </p:stCondLst>
+                                        </p:cTn>
+                                        <p:tgtEl>
+                                          <p:spTgt spid="31"/>
+                                        </p:tgtEl>
+                                        <p:attrNameLst>
+                                          <p:attrName>style.visibility</p:attrName>
+                                        </p:attrNameLst>
+                                      </p:cBhvr>
+                                      <p:to>
+                                        <p:strVal val="visible"/>
+                                      </p:to>
+                                    </p:set>
+                                  </p:childTnLst>
+                                </p:cTn>
+                              </p:par>
+                              <p:par>
+                                <p:cTn id="31" presetID="1" presetClass="entr" presetSubtype="0" fill="hold" grpId="0" nodeType="withEffect">
+                                  <p:stCondLst>
+                                    <p:cond delay="0"/>
+                                  </p:stCondLst>
+                                  <p:childTnLst>
+                                    <p:set>
+                                      <p:cBhvr>
+                                        <p:cTn id="32" dur="1" fill="hold">
+                                          <p:stCondLst>
+                                            <p:cond delay="0"/>
+                                          </p:stCondLst>
+                                        </p:cTn>
+                                        <p:tgtEl>
+                                          <p:spTgt spid="30"/>
+                                        </p:tgtEl>
+                                        <p:attrNameLst>
+                                          <p:attrName>style.visibility</p:attrName>
+                                        </p:attrNameLst>
+                                      </p:cBhvr>
+                                      <p:to>
+                                        <p:strVal val="visible"/>
+                                      </p:to>
+                                    </p:set>
+                                  </p:childTnLst>
+                                </p:cTn>
+                              </p:par>
+                              <p:par>
+                                <p:cTn id="33" presetID="1" presetClass="exit" presetSubtype="0" fill="hold" nodeType="withEffect">
+                                  <p:stCondLst>
+                                    <p:cond delay="0"/>
+                                  </p:stCondLst>
+                                  <p:childTnLst>
+                                    <p:set>
+                                      <p:cBhvr>
+                                        <p:cTn id="34" dur="1" fill="hold">
+                                          <p:stCondLst>
+                                            <p:cond delay="0"/>
+                                          </p:stCondLst>
+                                        </p:cTn>
+                                        <p:tgtEl>
+                                          <p:spTgt spid="10"/>
+                                        </p:tgtEl>
+                                        <p:attrNameLst>
+                                          <p:attrName>style.visibility</p:attrName>
+                                        </p:attrNameLst>
+                                      </p:cBhvr>
+                                      <p:to>
+                                        <p:strVal val="hidden"/>
+                                      </p:to>
+                                    </p:set>
+                                  </p:childTnLst>
+                                </p:cTn>
+                              </p:par>
+                              <p:par>
+                                <p:cTn id="35" presetID="1" presetClass="exit" presetSubtype="0" fill="hold" grpId="1" nodeType="withEffect">
+                                  <p:stCondLst>
+                                    <p:cond delay="0"/>
+                                  </p:stCondLst>
+                                  <p:childTnLst>
+                                    <p:set>
+                                      <p:cBhvr>
+                                        <p:cTn id="36" dur="1" fill="hold">
+                                          <p:stCondLst>
+                                            <p:cond delay="0"/>
+                                          </p:stCondLst>
+                                        </p:cTn>
+                                        <p:tgtEl>
+                                          <p:spTgt spid="7"/>
+                                        </p:tgtEl>
+                                        <p:attrNameLst>
+                                          <p:attrName>style.visibility</p:attrName>
+                                        </p:attrNameLst>
+                                      </p:cBhvr>
+                                      <p:to>
+                                        <p:strVal val="hidden"/>
+                                      </p:to>
+                                    </p:set>
+                                  </p:childTnLst>
+                                </p:cTn>
+                              </p:par>
+                              <p:par>
+                                <p:cTn id="37" presetID="1" presetClass="exit" presetSubtype="0" fill="hold" nodeType="withEffect">
+                                  <p:stCondLst>
+                                    <p:cond delay="0"/>
+                                  </p:stCondLst>
+                                  <p:childTnLst>
+                                    <p:set>
+                                      <p:cBhvr>
+                                        <p:cTn id="38" dur="1" fill="hold">
+                                          <p:stCondLst>
+                                            <p:cond delay="0"/>
+                                          </p:stCondLst>
+                                        </p:cTn>
+                                        <p:tgtEl>
+                                          <p:spTgt spid="26"/>
+                                        </p:tgtEl>
+                                        <p:attrNameLst>
+                                          <p:attrName>style.visibility</p:attrName>
+                                        </p:attrNameLst>
+                                      </p:cBhvr>
+                                      <p:to>
+                                        <p:strVal val="hidden"/>
+                                      </p:to>
+                                    </p:set>
+                                  </p:childTnLst>
+                                </p:cTn>
+                              </p:par>
+                              <p:par>
+                                <p:cTn id="39" presetID="1" presetClass="exit" presetSubtype="0" fill="hold" grpId="1" nodeType="withEffect">
+                                  <p:stCondLst>
+                                    <p:cond delay="0"/>
+                                  </p:stCondLst>
+                                  <p:childTnLst>
+                                    <p:set>
+                                      <p:cBhvr>
+                                        <p:cTn id="40" dur="1" fill="hold">
+                                          <p:stCondLst>
+                                            <p:cond delay="0"/>
+                                          </p:stCondLst>
+                                        </p:cTn>
+                                        <p:tgtEl>
+                                          <p:spTgt spid="25"/>
+                                        </p:tgtEl>
+                                        <p:attrNameLst>
+                                          <p:attrName>style.visibility</p:attrName>
+                                        </p:attrNameLst>
+                                      </p:cBhvr>
+                                      <p:to>
+                                        <p:strVal val="hidden"/>
+                                      </p:to>
+                                    </p:set>
+                                  </p:childTnLst>
+                                </p:cTn>
+                              </p:par>
+                            </p:childTnLst>
+                          </p:cTn>
+                        </p:par>
+                      </p:childTnLst>
+                    </p:cTn>
+                  </p:par>
+                </p:childTnLst>
+              </p:cTn>
+              <p:prevCondLst>
+                <p:cond evt="onPrev" delay="0">
+                  <p:tgtEl>
+                    <p:sldTgt/>
+                  </p:tgtEl>
+                </p:cond>
+              </p:prevCondLst>
+              <p:nextCondLst>
+                <p:cond evt="onNext" delay="0">
+                  <p:tgtEl>
+                    <p:sldTgt/>
+                  </p:tgtEl>
+                </p:cond>
+              </p:nextCondLst>
+            </p:seq>
+          </p:childTnLst>
+        </p:cTn>
+      </p:par>
+    </p:tnLst>
+    <p:bldLst>
+      <p:bldP spid="4" grpId="0" animBg="1"/>
+      <p:bldP spid="4" grpId="1" animBg="1"/>
+      <p:bldP spid="7" grpId="0" animBg="1"/>
+      <p:bldP spid="7" grpId="1" animBg="1"/>
+      <p:bldP spid="8" grpId="0" animBg="1"/>
+      <p:bldP spid="24" grpId="0" animBg="1"/>
+      <p:bldP spid="24" grpId="1" animBg="1"/>
+      <p:bldP spid="25" grpId="0" animBg="1"/>
+      <p:bldP spid="25" grpId="1" animBg="1"/>
+      <p:bldP spid="30" grpId="0" animBg="1"/>
+    </p:bldLst>
+  </p:timing>
 </p:sld>
 </file>
 
@@ -11829,7 +12491,7 @@
                 <a:latin typeface="Arial"/>
                 <a:cs typeface="Arial"/>
               </a:rPr>
-              <a:t>2807 Units</a:t>
+              <a:t>2902 Units</a:t>
             </a:r>
           </a:p>
           <a:p>
@@ -11839,7 +12501,7 @@
                 <a:latin typeface="Arial"/>
                 <a:cs typeface="Arial"/>
               </a:rPr>
-              <a:t>1169 Quantity Kinds</a:t>
+              <a:t>1242 Quantity Kinds</a:t>
             </a:r>
           </a:p>
           <a:p>
@@ -11849,7 +12511,7 @@
                 <a:latin typeface="Arial"/>
                 <a:cs typeface="Arial"/>
               </a:rPr>
-              <a:t>224 Dimension Vectors (for the 7 SI base dimensions)</a:t>
+              <a:t>223 Dimension Vectors (for the 7 SI base dimensions)</a:t>
             </a:r>
           </a:p>
           <a:p>
@@ -11859,7 +12521,7 @@
                 <a:latin typeface="Arial"/>
                 <a:cs typeface="Arial"/>
               </a:rPr>
-              <a:t>328 Physical Constants</a:t>
+              <a:t>331 Physical Constants</a:t>
             </a:r>
           </a:p>
           <a:p>
@@ -11962,34 +12624,6 @@
                 <a:cs typeface="Arial"/>
               </a:rPr>
               <a:t>QUDT is licensed under a Creative Commons Attribution 4.0 International License</a:t>
-            </a:r>
-          </a:p>
-        </p:txBody>
-      </p:sp>
-      <p:sp>
-        <p:nvSpPr>
-          <p:cNvPr id="20" name="Date Placeholder 19">
-            <a:extLst>
-              <a:ext uri="{FF2B5EF4-FFF2-40B4-BE49-F238E27FC236}">
-                <a16:creationId xmlns:a16="http://schemas.microsoft.com/office/drawing/2014/main" id="{0663595F-170C-2FAC-ACE9-DFA0374D60EC}"/>
-              </a:ext>
-            </a:extLst>
-          </p:cNvPr>
-          <p:cNvSpPr>
-            <a:spLocks noGrp="1"/>
-          </p:cNvSpPr>
-          <p:nvPr>
-            <p:ph type="dt" sz="half" idx="10"/>
-          </p:nvPr>
-        </p:nvSpPr>
-        <p:spPr/>
-        <p:txBody>
-          <a:bodyPr/>
-          <a:lstStyle/>
-          <a:p>
-            <a:r>
-              <a:rPr lang="en-US"/>
-              <a:t>20th May, 2025</a:t>
             </a:r>
           </a:p>
         </p:txBody>
@@ -12378,6 +13012,39 @@
               <a:t>A.html</a:t>
             </a:r>
             <a:endParaRPr lang="en-US" sz="1600"/>
+          </a:p>
+        </p:txBody>
+      </p:sp>
+      <p:sp>
+        <p:nvSpPr>
+          <p:cNvPr id="5" name="Date Placeholder 2">
+            <a:extLst>
+              <a:ext uri="{FF2B5EF4-FFF2-40B4-BE49-F238E27FC236}">
+                <a16:creationId xmlns:a16="http://schemas.microsoft.com/office/drawing/2014/main" id="{3631D938-6D69-2D65-4CC6-BF867BB18435}"/>
+              </a:ext>
+            </a:extLst>
+          </p:cNvPr>
+          <p:cNvSpPr>
+            <a:spLocks noGrp="1"/>
+          </p:cNvSpPr>
+          <p:nvPr>
+            <p:ph type="dt" sz="half" idx="10"/>
+          </p:nvPr>
+        </p:nvSpPr>
+        <p:spPr>
+          <a:xfrm>
+            <a:off x="187219" y="6356350"/>
+            <a:ext cx="2743200" cy="365125"/>
+          </a:xfrm>
+        </p:spPr>
+        <p:txBody>
+          <a:bodyPr/>
+          <a:lstStyle/>
+          <a:p>
+            <a:r>
+              <a:rPr lang="en-US" dirty="0"/>
+              <a:t>8 May 2025</a:t>
+            </a:r>
           </a:p>
         </p:txBody>
       </p:sp>
@@ -13011,34 +13678,6 @@
       </p:sp>
       <p:sp>
         <p:nvSpPr>
-          <p:cNvPr id="10" name="Date Placeholder 9">
-            <a:extLst>
-              <a:ext uri="{FF2B5EF4-FFF2-40B4-BE49-F238E27FC236}">
-                <a16:creationId xmlns:a16="http://schemas.microsoft.com/office/drawing/2014/main" id="{240CBCE2-4314-EE60-3C81-46F2F4EB9193}"/>
-              </a:ext>
-            </a:extLst>
-          </p:cNvPr>
-          <p:cNvSpPr>
-            <a:spLocks noGrp="1"/>
-          </p:cNvSpPr>
-          <p:nvPr>
-            <p:ph type="dt" sz="half" idx="10"/>
-          </p:nvPr>
-        </p:nvSpPr>
-        <p:spPr/>
-        <p:txBody>
-          <a:bodyPr/>
-          <a:lstStyle/>
-          <a:p>
-            <a:r>
-              <a:rPr lang="en-US"/>
-              <a:t>20th May, 2025</a:t>
-            </a:r>
-          </a:p>
-        </p:txBody>
-      </p:sp>
-      <p:sp>
-        <p:nvSpPr>
           <p:cNvPr id="11" name="Footer Placeholder 10">
             <a:extLst>
               <a:ext uri="{FF2B5EF4-FFF2-40B4-BE49-F238E27FC236}">
@@ -13091,6 +13730,39 @@
               <a:t>9</a:t>
             </a:fld>
             <a:endParaRPr lang="en-US"/>
+          </a:p>
+        </p:txBody>
+      </p:sp>
+      <p:sp>
+        <p:nvSpPr>
+          <p:cNvPr id="4" name="Date Placeholder 2">
+            <a:extLst>
+              <a:ext uri="{FF2B5EF4-FFF2-40B4-BE49-F238E27FC236}">
+                <a16:creationId xmlns:a16="http://schemas.microsoft.com/office/drawing/2014/main" id="{395B8276-FE2E-105F-1D6E-F63C3AF91600}"/>
+              </a:ext>
+            </a:extLst>
+          </p:cNvPr>
+          <p:cNvSpPr>
+            <a:spLocks noGrp="1"/>
+          </p:cNvSpPr>
+          <p:nvPr>
+            <p:ph type="dt" sz="half" idx="10"/>
+          </p:nvPr>
+        </p:nvSpPr>
+        <p:spPr>
+          <a:xfrm>
+            <a:off x="187219" y="6356350"/>
+            <a:ext cx="2743200" cy="365125"/>
+          </a:xfrm>
+        </p:spPr>
+        <p:txBody>
+          <a:bodyPr/>
+          <a:lstStyle/>
+          <a:p>
+            <a:r>
+              <a:rPr lang="en-US" dirty="0"/>
+              <a:t>8 May 2025</a:t>
+            </a:r>
           </a:p>
         </p:txBody>
       </p:sp>
@@ -13698,18 +14370,18 @@
 </file>
 
 <file path=customXml/item1.xml><?xml version="1.0" encoding="utf-8"?>
-<p:properties xmlns:p="http://schemas.microsoft.com/office/2006/metadata/properties" xmlns:xsi="http://www.w3.org/2001/XMLSchema-instance" xmlns:pc="http://schemas.microsoft.com/office/infopath/2007/PartnerControls">
-  <documentManagement/>
-</p:properties>
-</file>
-
-<file path=customXml/item2.xml><?xml version="1.0" encoding="utf-8"?>
 <?mso-contentType ?>
 <FormTemplates xmlns="http://schemas.microsoft.com/sharepoint/v3/contenttype/forms">
   <Display>DocumentLibraryForm</Display>
   <Edit>DocumentLibraryForm</Edit>
   <New>DocumentLibraryForm</New>
 </FormTemplates>
+</file>
+
+<file path=customXml/item2.xml><?xml version="1.0" encoding="utf-8"?>
+<p:properties xmlns:p="http://schemas.microsoft.com/office/2006/metadata/properties" xmlns:xsi="http://www.w3.org/2001/XMLSchema-instance" xmlns:pc="http://schemas.microsoft.com/office/infopath/2007/PartnerControls">
+  <documentManagement/>
+</p:properties>
 </file>
 
 <file path=customXml/item3.xml><?xml version="1.0" encoding="utf-8"?>
@@ -13851,18 +14523,18 @@
 </file>
 
 <file path=customXml/itemProps1.xml><?xml version="1.0" encoding="utf-8"?>
-<ds:datastoreItem xmlns:ds="http://schemas.openxmlformats.org/officeDocument/2006/customXml" ds:itemID="{FEF4F187-5340-4518-B5BB-8A26819D1691}">
+<ds:datastoreItem xmlns:ds="http://schemas.openxmlformats.org/officeDocument/2006/customXml" ds:itemID="{E82BE622-A483-4FA2-856C-6C3A5AD626A8}">
   <ds:schemaRefs>
-    <ds:schemaRef ds:uri="http://schemas.microsoft.com/office/2006/metadata/properties"/>
-    <ds:schemaRef ds:uri="http://schemas.microsoft.com/office/infopath/2007/PartnerControls"/>
+    <ds:schemaRef ds:uri="http://schemas.microsoft.com/sharepoint/v3/contenttype/forms"/>
   </ds:schemaRefs>
 </ds:datastoreItem>
 </file>
 
 <file path=customXml/itemProps2.xml><?xml version="1.0" encoding="utf-8"?>
-<ds:datastoreItem xmlns:ds="http://schemas.openxmlformats.org/officeDocument/2006/customXml" ds:itemID="{E82BE622-A483-4FA2-856C-6C3A5AD626A8}">
+<ds:datastoreItem xmlns:ds="http://schemas.openxmlformats.org/officeDocument/2006/customXml" ds:itemID="{FEF4F187-5340-4518-B5BB-8A26819D1691}">
   <ds:schemaRefs>
-    <ds:schemaRef ds:uri="http://schemas.microsoft.com/sharepoint/v3/contenttype/forms"/>
+    <ds:schemaRef ds:uri="http://schemas.microsoft.com/office/2006/metadata/properties"/>
+    <ds:schemaRef ds:uri="http://schemas.microsoft.com/office/infopath/2007/PartnerControls"/>
   </ds:schemaRefs>
 </ds:datastoreItem>
 </file>
